--- a/Chapter 10 Interpreting what ConvNets learn.pptx
+++ b/Chapter 10 Interpreting what ConvNets learn.pptx
@@ -5,21 +5,20 @@
     <p:sldMasterId id="2147483660" r:id="rId1"/>
   </p:sldMasterIdLst>
   <p:notesMasterIdLst>
-    <p:notesMasterId r:id="rId11"/>
+    <p:notesMasterId r:id="rId10"/>
   </p:notesMasterIdLst>
   <p:handoutMasterIdLst>
-    <p:handoutMasterId r:id="rId12"/>
+    <p:handoutMasterId r:id="rId11"/>
   </p:handoutMasterIdLst>
   <p:sldIdLst>
     <p:sldId id="256" r:id="rId2"/>
     <p:sldId id="1136" r:id="rId3"/>
-    <p:sldId id="1138" r:id="rId4"/>
-    <p:sldId id="1139" r:id="rId5"/>
-    <p:sldId id="1140" r:id="rId6"/>
-    <p:sldId id="1141" r:id="rId7"/>
-    <p:sldId id="1142" r:id="rId8"/>
-    <p:sldId id="1143" r:id="rId9"/>
-    <p:sldId id="1144" r:id="rId10"/>
+    <p:sldId id="1144" r:id="rId4"/>
+    <p:sldId id="1145" r:id="rId5"/>
+    <p:sldId id="1138" r:id="rId6"/>
+    <p:sldId id="1139" r:id="rId7"/>
+    <p:sldId id="1140" r:id="rId8"/>
+    <p:sldId id="1141" r:id="rId9"/>
   </p:sldIdLst>
   <p:sldSz cx="12192000" cy="6858000"/>
   <p:notesSz cx="6858000" cy="9144000"/>
@@ -129,13 +128,12 @@
         <p14:section name="디자인, 모핑, 주석 달기, 공동 작업, 입력하세요" id="{B9B51309-D148-4332-87C2-07BE32FBCA3B}">
           <p14:sldIdLst>
             <p14:sldId id="1136"/>
+            <p14:sldId id="1144"/>
+            <p14:sldId id="1145"/>
             <p14:sldId id="1138"/>
             <p14:sldId id="1139"/>
             <p14:sldId id="1140"/>
             <p14:sldId id="1141"/>
-            <p14:sldId id="1142"/>
-            <p14:sldId id="1143"/>
-            <p14:sldId id="1144"/>
           </p14:sldIdLst>
         </p14:section>
         <p14:section name="자세한 정보" id="{2CC34DB2-6590-42C0-AD4B-A04C6060184E}">
@@ -3295,6 +3293,1840 @@
         <p:cNvPr id="1" name="">
           <a:extLst>
             <a:ext uri="{FF2B5EF4-FFF2-40B4-BE49-F238E27FC236}">
+              <a16:creationId xmlns:a16="http://schemas.microsoft.com/office/drawing/2014/main" id="{A4859ECB-1ADE-67B3-8CAE-2F612B316899}"/>
+            </a:ext>
+          </a:extLst>
+        </p:cNvPr>
+        <p:cNvGrpSpPr/>
+        <p:nvPr/>
+      </p:nvGrpSpPr>
+      <p:grpSpPr>
+        <a:xfrm>
+          <a:off x="0" y="0"/>
+          <a:ext cx="0" cy="0"/>
+          <a:chOff x="0" y="0"/>
+          <a:chExt cx="0" cy="0"/>
+        </a:xfrm>
+      </p:grpSpPr>
+      <p:sp>
+        <p:nvSpPr>
+          <p:cNvPr id="4" name="슬라이드 번호 개체 틀 3">
+            <a:extLst>
+              <a:ext uri="{FF2B5EF4-FFF2-40B4-BE49-F238E27FC236}">
+                <a16:creationId xmlns:a16="http://schemas.microsoft.com/office/drawing/2014/main" id="{D21C4870-5BBA-ABE6-D324-0BFEDE78D798}"/>
+              </a:ext>
+            </a:extLst>
+          </p:cNvPr>
+          <p:cNvSpPr>
+            <a:spLocks noGrp="1"/>
+          </p:cNvSpPr>
+          <p:nvPr>
+            <p:ph type="sldNum" sz="quarter" idx="12"/>
+          </p:nvPr>
+        </p:nvSpPr>
+        <p:spPr>
+          <a:xfrm>
+            <a:off x="10514011" y="6036261"/>
+            <a:ext cx="753545" cy="365125"/>
+          </a:xfrm>
+        </p:spPr>
+        <p:txBody>
+          <a:bodyPr/>
+          <a:lstStyle/>
+          <a:p>
+            <a:fld id="{D57F1E4F-1CFF-5643-939E-217C01CDF565}" type="slidenum">
+              <a:rPr lang="en-US" smtClean="0"/>
+              <a:pPr/>
+              <a:t>3</a:t>
+            </a:fld>
+            <a:endParaRPr lang="en-US" dirty="0"/>
+          </a:p>
+        </p:txBody>
+      </p:sp>
+      <p:sp>
+        <p:nvSpPr>
+          <p:cNvPr id="3" name="제목 1">
+            <a:extLst>
+              <a:ext uri="{FF2B5EF4-FFF2-40B4-BE49-F238E27FC236}">
+                <a16:creationId xmlns:a16="http://schemas.microsoft.com/office/drawing/2014/main" id="{07697D12-A4EA-A564-F3A4-AD0AD672A979}"/>
+              </a:ext>
+            </a:extLst>
+          </p:cNvPr>
+          <p:cNvSpPr txBox="1">
+            <a:spLocks/>
+          </p:cNvSpPr>
+          <p:nvPr/>
+        </p:nvSpPr>
+        <p:spPr>
+          <a:xfrm>
+            <a:off x="475645" y="481983"/>
+            <a:ext cx="10353762" cy="766439"/>
+          </a:xfrm>
+          <a:prstGeom prst="rect">
+            <a:avLst/>
+          </a:prstGeom>
+        </p:spPr>
+        <p:txBody>
+          <a:bodyPr vert="horz" lIns="91440" tIns="45720" rIns="91440" bIns="45720" rtlCol="0" anchor="ctr">
+            <a:normAutofit/>
+          </a:bodyPr>
+          <a:lstStyle>
+            <a:lvl1pPr algn="ctr" defTabSz="914400" rtl="0" eaLnBrk="1" latinLnBrk="1" hangingPunct="1">
+              <a:lnSpc>
+                <a:spcPct val="90000"/>
+              </a:lnSpc>
+              <a:spcBef>
+                <a:spcPct val="0"/>
+              </a:spcBef>
+              <a:buNone/>
+              <a:defRPr sz="3200" kern="1200" cap="all" baseline="0">
+                <a:solidFill>
+                  <a:schemeClr val="tx1"/>
+                </a:solidFill>
+                <a:effectLst/>
+                <a:latin typeface="Batang" panose="02030600000101010101" pitchFamily="18" charset="-127"/>
+                <a:ea typeface="Batang" panose="02030600000101010101" pitchFamily="18" charset="-127"/>
+                <a:cs typeface="+mj-cs"/>
+              </a:defRPr>
+            </a:lvl1pPr>
+          </a:lstStyle>
+          <a:p>
+            <a:pPr algn="l"/>
+            <a:r>
+              <a:rPr lang="en-US" altLang="ko-KR" sz="2800" cap="none" dirty="0">
+                <a:solidFill>
+                  <a:schemeClr val="bg2">
+                    <a:lumMod val="25000"/>
+                  </a:schemeClr>
+                </a:solidFill>
+                <a:latin typeface="D2Coding" panose="020B0609020101020101" pitchFamily="49" charset="-127"/>
+                <a:ea typeface="D2Coding" panose="020B0609020101020101" pitchFamily="49" charset="-127"/>
+                <a:cs typeface="Segoe UI Light" panose="020B0502040204020203" pitchFamily="34" charset="0"/>
+              </a:rPr>
+              <a:t>How to recognize(perceive</a:t>
+            </a:r>
+            <a:r>
+              <a:rPr lang="ko-KR" altLang="en-US" sz="2800" cap="none" dirty="0">
+                <a:solidFill>
+                  <a:schemeClr val="bg2">
+                    <a:lumMod val="25000"/>
+                  </a:schemeClr>
+                </a:solidFill>
+                <a:latin typeface="D2Coding" panose="020B0609020101020101" pitchFamily="49" charset="-127"/>
+                <a:ea typeface="D2Coding" panose="020B0609020101020101" pitchFamily="49" charset="-127"/>
+                <a:cs typeface="Segoe UI Light" panose="020B0502040204020203" pitchFamily="34" charset="0"/>
+              </a:rPr>
+              <a:t> </a:t>
+            </a:r>
+            <a:r>
+              <a:rPr lang="en-US" altLang="ko-KR" sz="2800" cap="none" dirty="0">
+                <a:solidFill>
+                  <a:schemeClr val="bg2">
+                    <a:lumMod val="25000"/>
+                  </a:schemeClr>
+                </a:solidFill>
+                <a:latin typeface="D2Coding" panose="020B0609020101020101" pitchFamily="49" charset="-127"/>
+                <a:ea typeface="D2Coding" panose="020B0609020101020101" pitchFamily="49" charset="-127"/>
+                <a:cs typeface="Segoe UI Light" panose="020B0502040204020203" pitchFamily="34" charset="0"/>
+              </a:rPr>
+              <a:t>&amp;</a:t>
+            </a:r>
+            <a:r>
+              <a:rPr lang="ko-KR" altLang="en-US" sz="2800" cap="none" dirty="0">
+                <a:solidFill>
+                  <a:schemeClr val="bg2">
+                    <a:lumMod val="25000"/>
+                  </a:schemeClr>
+                </a:solidFill>
+                <a:latin typeface="D2Coding" panose="020B0609020101020101" pitchFamily="49" charset="-127"/>
+                <a:ea typeface="D2Coding" panose="020B0609020101020101" pitchFamily="49" charset="-127"/>
+                <a:cs typeface="Segoe UI Light" panose="020B0502040204020203" pitchFamily="34" charset="0"/>
+              </a:rPr>
+              <a:t> </a:t>
+            </a:r>
+            <a:r>
+              <a:rPr lang="en-US" altLang="ko-KR" sz="2800" cap="none" dirty="0">
+                <a:solidFill>
+                  <a:schemeClr val="bg2">
+                    <a:lumMod val="25000"/>
+                  </a:schemeClr>
+                </a:solidFill>
+                <a:latin typeface="D2Coding" panose="020B0609020101020101" pitchFamily="49" charset="-127"/>
+                <a:ea typeface="D2Coding" panose="020B0609020101020101" pitchFamily="49" charset="-127"/>
+                <a:cs typeface="Segoe UI Light" panose="020B0502040204020203" pitchFamily="34" charset="0"/>
+              </a:rPr>
+              <a:t>classify) Image</a:t>
+            </a:r>
+          </a:p>
+        </p:txBody>
+      </p:sp>
+      <p:pic>
+        <p:nvPicPr>
+          <p:cNvPr id="8195" name="Picture 3" descr="첨부 이미지">
+            <a:extLst>
+              <a:ext uri="{FF2B5EF4-FFF2-40B4-BE49-F238E27FC236}">
+                <a16:creationId xmlns:a16="http://schemas.microsoft.com/office/drawing/2014/main" id="{A2FCCDA1-238F-34E5-22D1-C586254C1912}"/>
+              </a:ext>
+            </a:extLst>
+          </p:cNvPr>
+          <p:cNvPicPr>
+            <a:picLocks noChangeAspect="1" noChangeArrowheads="1"/>
+          </p:cNvPicPr>
+          <p:nvPr/>
+        </p:nvPicPr>
+        <p:blipFill>
+          <a:blip r:embed="rId2">
+            <a:extLst>
+              <a:ext uri="{28A0092B-C50C-407E-A947-70E740481C1C}">
+                <a14:useLocalDpi xmlns:a14="http://schemas.microsoft.com/office/drawing/2010/main" val="0"/>
+              </a:ext>
+            </a:extLst>
+          </a:blip>
+          <a:srcRect/>
+          <a:stretch>
+            <a:fillRect/>
+          </a:stretch>
+        </p:blipFill>
+        <p:spPr bwMode="auto">
+          <a:xfrm>
+            <a:off x="647700" y="2372823"/>
+            <a:ext cx="4514850" cy="3156868"/>
+          </a:xfrm>
+          <a:prstGeom prst="rect">
+            <a:avLst/>
+          </a:prstGeom>
+          <a:noFill/>
+          <a:extLst>
+            <a:ext uri="{909E8E84-426E-40DD-AFC4-6F175D3DCCD1}">
+              <a14:hiddenFill xmlns:a14="http://schemas.microsoft.com/office/drawing/2010/main">
+                <a:solidFill>
+                  <a:srgbClr val="FFFFFF"/>
+                </a:solidFill>
+              </a14:hiddenFill>
+            </a:ext>
+          </a:extLst>
+        </p:spPr>
+      </p:pic>
+      <p:sp>
+        <p:nvSpPr>
+          <p:cNvPr id="6" name="TextBox 5">
+            <a:extLst>
+              <a:ext uri="{FF2B5EF4-FFF2-40B4-BE49-F238E27FC236}">
+                <a16:creationId xmlns:a16="http://schemas.microsoft.com/office/drawing/2014/main" id="{0EF76525-5D8A-1C44-FEFC-E0CAE1AD0F1C}"/>
+              </a:ext>
+            </a:extLst>
+          </p:cNvPr>
+          <p:cNvSpPr txBox="1"/>
+          <p:nvPr/>
+        </p:nvSpPr>
+        <p:spPr>
+          <a:xfrm>
+            <a:off x="647700" y="1923035"/>
+            <a:ext cx="3775393" cy="338554"/>
+          </a:xfrm>
+          <a:prstGeom prst="rect">
+            <a:avLst/>
+          </a:prstGeom>
+          <a:noFill/>
+        </p:spPr>
+        <p:txBody>
+          <a:bodyPr wrap="none" rtlCol="0">
+            <a:spAutoFit/>
+          </a:bodyPr>
+          <a:lstStyle/>
+          <a:p>
+            <a:r>
+              <a:rPr lang="ko-KR" altLang="en-US" sz="1600" dirty="0">
+                <a:latin typeface="D2Coding" panose="020B0609020101020101" pitchFamily="49" charset="-127"/>
+                <a:ea typeface="D2Coding" panose="020B0609020101020101" pitchFamily="49" charset="-127"/>
+                <a:hlinkClick r:id="rId3">
+                  <a:extLst>
+                    <a:ext uri="{A12FA001-AC4F-418D-AE19-62706E023703}">
+                      <ahyp:hlinkClr xmlns:ahyp="http://schemas.microsoft.com/office/drawing/2018/hyperlinkcolor" val="tx"/>
+                    </a:ext>
+                  </a:extLst>
+                </a:hlinkClick>
+              </a:rPr>
+              <a:t>인간의 시각 인지</a:t>
+            </a:r>
+            <a:r>
+              <a:rPr lang="en-US" altLang="ko-KR" sz="1600" dirty="0">
+                <a:latin typeface="D2Coding" panose="020B0609020101020101" pitchFamily="49" charset="-127"/>
+                <a:ea typeface="D2Coding" panose="020B0609020101020101" pitchFamily="49" charset="-127"/>
+                <a:hlinkClick r:id="rId3">
+                  <a:extLst>
+                    <a:ext uri="{A12FA001-AC4F-418D-AE19-62706E023703}">
+                      <ahyp:hlinkClr xmlns:ahyp="http://schemas.microsoft.com/office/drawing/2018/hyperlinkcolor" val="tx"/>
+                    </a:ext>
+                  </a:extLst>
+                </a:hlinkClick>
+              </a:rPr>
+              <a:t>(Visual Perception)</a:t>
+            </a:r>
+            <a:endParaRPr lang="ko-KR" altLang="en-US" sz="1600" dirty="0">
+              <a:latin typeface="D2Coding" panose="020B0609020101020101" pitchFamily="49" charset="-127"/>
+              <a:ea typeface="D2Coding" panose="020B0609020101020101" pitchFamily="49" charset="-127"/>
+            </a:endParaRPr>
+          </a:p>
+        </p:txBody>
+      </p:sp>
+      <p:pic>
+        <p:nvPicPr>
+          <p:cNvPr id="8197" name="Picture 5" descr="Figure 3">
+            <a:extLst>
+              <a:ext uri="{FF2B5EF4-FFF2-40B4-BE49-F238E27FC236}">
+                <a16:creationId xmlns:a16="http://schemas.microsoft.com/office/drawing/2014/main" id="{C5A09589-30A6-6317-A157-684698658B73}"/>
+              </a:ext>
+            </a:extLst>
+          </p:cNvPr>
+          <p:cNvPicPr>
+            <a:picLocks noChangeAspect="1" noChangeArrowheads="1"/>
+          </p:cNvPicPr>
+          <p:nvPr/>
+        </p:nvPicPr>
+        <p:blipFill>
+          <a:blip r:embed="rId4">
+            <a:extLst>
+              <a:ext uri="{28A0092B-C50C-407E-A947-70E740481C1C}">
+                <a14:useLocalDpi xmlns:a14="http://schemas.microsoft.com/office/drawing/2010/main" val="0"/>
+              </a:ext>
+            </a:extLst>
+          </a:blip>
+          <a:srcRect/>
+          <a:stretch>
+            <a:fillRect/>
+          </a:stretch>
+        </p:blipFill>
+        <p:spPr bwMode="auto">
+          <a:xfrm>
+            <a:off x="5715582" y="2372823"/>
+            <a:ext cx="5895393" cy="1688784"/>
+          </a:xfrm>
+          <a:prstGeom prst="rect">
+            <a:avLst/>
+          </a:prstGeom>
+          <a:noFill/>
+          <a:extLst>
+            <a:ext uri="{909E8E84-426E-40DD-AFC4-6F175D3DCCD1}">
+              <a14:hiddenFill xmlns:a14="http://schemas.microsoft.com/office/drawing/2010/main">
+                <a:solidFill>
+                  <a:srgbClr val="FFFFFF"/>
+                </a:solidFill>
+              </a14:hiddenFill>
+            </a:ext>
+          </a:extLst>
+        </p:spPr>
+      </p:pic>
+      <p:sp>
+        <p:nvSpPr>
+          <p:cNvPr id="7" name="TextBox 6">
+            <a:extLst>
+              <a:ext uri="{FF2B5EF4-FFF2-40B4-BE49-F238E27FC236}">
+                <a16:creationId xmlns:a16="http://schemas.microsoft.com/office/drawing/2014/main" id="{E43A0ABF-3D55-82A2-3B7F-CD62CD808868}"/>
+              </a:ext>
+            </a:extLst>
+          </p:cNvPr>
+          <p:cNvSpPr txBox="1"/>
+          <p:nvPr/>
+        </p:nvSpPr>
+        <p:spPr>
+          <a:xfrm>
+            <a:off x="5887032" y="1923035"/>
+            <a:ext cx="5266224" cy="338554"/>
+          </a:xfrm>
+          <a:prstGeom prst="rect">
+            <a:avLst/>
+          </a:prstGeom>
+          <a:noFill/>
+        </p:spPr>
+        <p:txBody>
+          <a:bodyPr wrap="square" rtlCol="0">
+            <a:spAutoFit/>
+          </a:bodyPr>
+          <a:lstStyle/>
+          <a:p>
+            <a:r>
+              <a:rPr lang="en-US" altLang="ko-KR" sz="1600" dirty="0">
+                <a:latin typeface="D2Coding" panose="020B0609020101020101" pitchFamily="49" charset="-127"/>
+                <a:ea typeface="D2Coding" panose="020B0609020101020101" pitchFamily="49" charset="-127"/>
+                <a:hlinkClick r:id="rId5">
+                  <a:extLst>
+                    <a:ext uri="{A12FA001-AC4F-418D-AE19-62706E023703}">
+                      <ahyp:hlinkClr xmlns:ahyp="http://schemas.microsoft.com/office/drawing/2018/hyperlinkcolor" val="tx"/>
+                    </a:ext>
+                  </a:extLst>
+                </a:hlinkClick>
+              </a:rPr>
+              <a:t>Convnet An </a:t>
+            </a:r>
+            <a:r>
+              <a:rPr lang="en-US" altLang="ko-KR" sz="1600" dirty="0" err="1">
+                <a:latin typeface="D2Coding" panose="020B0609020101020101" pitchFamily="49" charset="-127"/>
+                <a:ea typeface="D2Coding" panose="020B0609020101020101" pitchFamily="49" charset="-127"/>
+                <a:hlinkClick r:id="rId5">
+                  <a:extLst>
+                    <a:ext uri="{A12FA001-AC4F-418D-AE19-62706E023703}">
+                      <ahyp:hlinkClr xmlns:ahyp="http://schemas.microsoft.com/office/drawing/2018/hyperlinkcolor" val="tx"/>
+                    </a:ext>
+                  </a:extLst>
+                </a:hlinkClick>
+              </a:rPr>
+              <a:t>xception</a:t>
+            </a:r>
+            <a:r>
+              <a:rPr lang="en-US" altLang="ko-KR" sz="1600" dirty="0">
+                <a:latin typeface="D2Coding" panose="020B0609020101020101" pitchFamily="49" charset="-127"/>
+                <a:ea typeface="D2Coding" panose="020B0609020101020101" pitchFamily="49" charset="-127"/>
+                <a:hlinkClick r:id="rId5">
+                  <a:extLst>
+                    <a:ext uri="{A12FA001-AC4F-418D-AE19-62706E023703}">
+                      <ahyp:hlinkClr xmlns:ahyp="http://schemas.microsoft.com/office/drawing/2018/hyperlinkcolor" val="tx"/>
+                    </a:ext>
+                  </a:extLst>
+                </a:hlinkClick>
+              </a:rPr>
+              <a:t> model</a:t>
+            </a:r>
+            <a:r>
+              <a:rPr lang="ko-KR" altLang="en-US" sz="1600" dirty="0">
+                <a:latin typeface="D2Coding" panose="020B0609020101020101" pitchFamily="49" charset="-127"/>
+                <a:ea typeface="D2Coding" panose="020B0609020101020101" pitchFamily="49" charset="-127"/>
+              </a:rPr>
+              <a:t>의 이미지 인지 및 분류</a:t>
+            </a:r>
+          </a:p>
+        </p:txBody>
+      </p:sp>
+    </p:spTree>
+    <p:extLst>
+      <p:ext uri="{BB962C8B-B14F-4D97-AF65-F5344CB8AC3E}">
+        <p14:creationId xmlns:p14="http://schemas.microsoft.com/office/powerpoint/2010/main" val="4121607471"/>
+      </p:ext>
+    </p:extLst>
+  </p:cSld>
+  <p:clrMapOvr>
+    <a:masterClrMapping/>
+  </p:clrMapOvr>
+</p:sld>
+</file>
+
+<file path=ppt/slides/slide4.xml><?xml version="1.0" encoding="utf-8"?>
+<p:sld xmlns:a="http://schemas.openxmlformats.org/drawingml/2006/main" xmlns:r="http://schemas.openxmlformats.org/officeDocument/2006/relationships" xmlns:p="http://schemas.openxmlformats.org/presentationml/2006/main">
+  <p:cSld>
+    <p:spTree>
+      <p:nvGrpSpPr>
+        <p:cNvPr id="1" name="">
+          <a:extLst>
+            <a:ext uri="{FF2B5EF4-FFF2-40B4-BE49-F238E27FC236}">
+              <a16:creationId xmlns:a16="http://schemas.microsoft.com/office/drawing/2014/main" id="{D37C8D62-957F-BB3E-2B47-CA0AB2C71EC9}"/>
+            </a:ext>
+          </a:extLst>
+        </p:cNvPr>
+        <p:cNvGrpSpPr/>
+        <p:nvPr/>
+      </p:nvGrpSpPr>
+      <p:grpSpPr>
+        <a:xfrm>
+          <a:off x="0" y="0"/>
+          <a:ext cx="0" cy="0"/>
+          <a:chOff x="0" y="0"/>
+          <a:chExt cx="0" cy="0"/>
+        </a:xfrm>
+      </p:grpSpPr>
+      <p:sp>
+        <p:nvSpPr>
+          <p:cNvPr id="4" name="슬라이드 번호 개체 틀 3">
+            <a:extLst>
+              <a:ext uri="{FF2B5EF4-FFF2-40B4-BE49-F238E27FC236}">
+                <a16:creationId xmlns:a16="http://schemas.microsoft.com/office/drawing/2014/main" id="{3BE58852-75A2-993F-D239-6E9BBE9C4B28}"/>
+              </a:ext>
+            </a:extLst>
+          </p:cNvPr>
+          <p:cNvSpPr>
+            <a:spLocks noGrp="1"/>
+          </p:cNvSpPr>
+          <p:nvPr>
+            <p:ph type="sldNum" sz="quarter" idx="12"/>
+          </p:nvPr>
+        </p:nvSpPr>
+        <p:spPr>
+          <a:xfrm>
+            <a:off x="10514011" y="6036261"/>
+            <a:ext cx="753545" cy="365125"/>
+          </a:xfrm>
+        </p:spPr>
+        <p:txBody>
+          <a:bodyPr/>
+          <a:lstStyle/>
+          <a:p>
+            <a:fld id="{D57F1E4F-1CFF-5643-939E-217C01CDF565}" type="slidenum">
+              <a:rPr lang="en-US" smtClean="0"/>
+              <a:pPr/>
+              <a:t>4</a:t>
+            </a:fld>
+            <a:endParaRPr lang="en-US" dirty="0"/>
+          </a:p>
+        </p:txBody>
+      </p:sp>
+      <p:sp>
+        <p:nvSpPr>
+          <p:cNvPr id="3" name="제목 1">
+            <a:extLst>
+              <a:ext uri="{FF2B5EF4-FFF2-40B4-BE49-F238E27FC236}">
+                <a16:creationId xmlns:a16="http://schemas.microsoft.com/office/drawing/2014/main" id="{60F4F250-354D-6332-329E-B08948B969EA}"/>
+              </a:ext>
+            </a:extLst>
+          </p:cNvPr>
+          <p:cNvSpPr txBox="1">
+            <a:spLocks/>
+          </p:cNvSpPr>
+          <p:nvPr/>
+        </p:nvSpPr>
+        <p:spPr>
+          <a:xfrm>
+            <a:off x="475645" y="481983"/>
+            <a:ext cx="10353762" cy="766439"/>
+          </a:xfrm>
+          <a:prstGeom prst="rect">
+            <a:avLst/>
+          </a:prstGeom>
+        </p:spPr>
+        <p:txBody>
+          <a:bodyPr vert="horz" lIns="91440" tIns="45720" rIns="91440" bIns="45720" rtlCol="0" anchor="ctr">
+            <a:normAutofit/>
+          </a:bodyPr>
+          <a:lstStyle>
+            <a:lvl1pPr algn="ctr" defTabSz="914400" rtl="0" eaLnBrk="1" latinLnBrk="1" hangingPunct="1">
+              <a:lnSpc>
+                <a:spcPct val="90000"/>
+              </a:lnSpc>
+              <a:spcBef>
+                <a:spcPct val="0"/>
+              </a:spcBef>
+              <a:buNone/>
+              <a:defRPr sz="3200" kern="1200" cap="all" baseline="0">
+                <a:solidFill>
+                  <a:schemeClr val="tx1"/>
+                </a:solidFill>
+                <a:effectLst/>
+                <a:latin typeface="Batang" panose="02030600000101010101" pitchFamily="18" charset="-127"/>
+                <a:ea typeface="Batang" panose="02030600000101010101" pitchFamily="18" charset="-127"/>
+                <a:cs typeface="+mj-cs"/>
+              </a:defRPr>
+            </a:lvl1pPr>
+          </a:lstStyle>
+          <a:p>
+            <a:pPr algn="l"/>
+            <a:r>
+              <a:rPr lang="en-US" altLang="ko-KR" sz="2800" cap="none" dirty="0">
+                <a:solidFill>
+                  <a:schemeClr val="bg2">
+                    <a:lumMod val="25000"/>
+                  </a:schemeClr>
+                </a:solidFill>
+                <a:latin typeface="D2Coding" panose="020B0609020101020101" pitchFamily="49" charset="-127"/>
+                <a:ea typeface="D2Coding" panose="020B0609020101020101" pitchFamily="49" charset="-127"/>
+                <a:cs typeface="Segoe UI Light" panose="020B0502040204020203" pitchFamily="34" charset="0"/>
+              </a:rPr>
+              <a:t>How to recognize Image</a:t>
+            </a:r>
+          </a:p>
+        </p:txBody>
+      </p:sp>
+      <p:sp>
+        <p:nvSpPr>
+          <p:cNvPr id="5" name="TextBox 4">
+            <a:extLst>
+              <a:ext uri="{FF2B5EF4-FFF2-40B4-BE49-F238E27FC236}">
+                <a16:creationId xmlns:a16="http://schemas.microsoft.com/office/drawing/2014/main" id="{4B8818DF-3622-2AF7-FAC2-4E60FDEB7CBA}"/>
+              </a:ext>
+            </a:extLst>
+          </p:cNvPr>
+          <p:cNvSpPr txBox="1"/>
+          <p:nvPr/>
+        </p:nvSpPr>
+        <p:spPr>
+          <a:xfrm>
+            <a:off x="682484" y="1332297"/>
+            <a:ext cx="10890392" cy="4722127"/>
+          </a:xfrm>
+          <a:prstGeom prst="rect">
+            <a:avLst/>
+          </a:prstGeom>
+          <a:noFill/>
+        </p:spPr>
+        <p:txBody>
+          <a:bodyPr wrap="square" rtlCol="0">
+            <a:spAutoFit/>
+          </a:bodyPr>
+          <a:lstStyle/>
+          <a:p>
+            <a:pPr fontAlgn="base">
+              <a:lnSpc>
+                <a:spcPct val="150000"/>
+              </a:lnSpc>
+              <a:spcBef>
+                <a:spcPct val="0"/>
+              </a:spcBef>
+              <a:spcAft>
+                <a:spcPct val="0"/>
+              </a:spcAft>
+            </a:pPr>
+            <a:r>
+              <a:rPr lang="ko-KR" altLang="en-US" sz="1600" dirty="0">
+                <a:latin typeface="D2Coding" panose="020B0609020101020101" pitchFamily="49" charset="-127"/>
+                <a:ea typeface="D2Coding" panose="020B0609020101020101" pitchFamily="49" charset="-127"/>
+              </a:rPr>
+              <a:t>인간과 컴퓨터 모두 </a:t>
+            </a:r>
+            <a:r>
+              <a:rPr lang="en-US" altLang="ko-KR" sz="1600" dirty="0">
+                <a:latin typeface="D2Coding" panose="020B0609020101020101" pitchFamily="49" charset="-127"/>
+                <a:ea typeface="D2Coding" panose="020B0609020101020101" pitchFamily="49" charset="-127"/>
+              </a:rPr>
+              <a:t>[</a:t>
+            </a:r>
+            <a:r>
+              <a:rPr lang="ko-KR" altLang="en-US" sz="1600" dirty="0">
+                <a:latin typeface="D2Coding" panose="020B0609020101020101" pitchFamily="49" charset="-127"/>
+                <a:ea typeface="D2Coding" panose="020B0609020101020101" pitchFamily="49" charset="-127"/>
+              </a:rPr>
+              <a:t>선</a:t>
+            </a:r>
+            <a:r>
+              <a:rPr lang="en-US" altLang="ko-KR" sz="1600" dirty="0">
+                <a:latin typeface="D2Coding" panose="020B0609020101020101" pitchFamily="49" charset="-127"/>
+                <a:ea typeface="D2Coding" panose="020B0609020101020101" pitchFamily="49" charset="-127"/>
+              </a:rPr>
+              <a:t>/</a:t>
+            </a:r>
+            <a:r>
+              <a:rPr lang="ko-KR" altLang="en-US" sz="1600" dirty="0">
+                <a:latin typeface="D2Coding" panose="020B0609020101020101" pitchFamily="49" charset="-127"/>
+                <a:ea typeface="D2Coding" panose="020B0609020101020101" pitchFamily="49" charset="-127"/>
+              </a:rPr>
+              <a:t>면</a:t>
+            </a:r>
+            <a:r>
+              <a:rPr lang="en-US" altLang="ko-KR" sz="1600" dirty="0">
+                <a:latin typeface="D2Coding" panose="020B0609020101020101" pitchFamily="49" charset="-127"/>
+                <a:ea typeface="D2Coding" panose="020B0609020101020101" pitchFamily="49" charset="-127"/>
+              </a:rPr>
+              <a:t>(</a:t>
+            </a:r>
+            <a:r>
+              <a:rPr lang="ko-KR" altLang="en-US" sz="1600" dirty="0">
+                <a:latin typeface="D2Coding" panose="020B0609020101020101" pitchFamily="49" charset="-127"/>
+                <a:ea typeface="D2Coding" panose="020B0609020101020101" pitchFamily="49" charset="-127"/>
+              </a:rPr>
+              <a:t>하위</a:t>
+            </a:r>
+            <a:r>
+              <a:rPr lang="en-US" altLang="ko-KR" sz="1600" dirty="0">
+                <a:latin typeface="D2Coding" panose="020B0609020101020101" pitchFamily="49" charset="-127"/>
+                <a:ea typeface="D2Coding" panose="020B0609020101020101" pitchFamily="49" charset="-127"/>
+              </a:rPr>
+              <a:t>) </a:t>
+            </a:r>
+            <a:r>
+              <a:rPr lang="en-US" altLang="ko-KR" sz="1600" dirty="0">
+                <a:latin typeface="D2Coding" panose="020B0609020101020101" pitchFamily="49" charset="-127"/>
+                <a:ea typeface="D2Coding" panose="020B0609020101020101" pitchFamily="49" charset="-127"/>
+                <a:sym typeface="Wingdings" panose="05000000000000000000" pitchFamily="2" charset="2"/>
+              </a:rPr>
+              <a:t> </a:t>
+            </a:r>
+            <a:r>
+              <a:rPr lang="ko-KR" altLang="en-US" sz="1600" dirty="0">
+                <a:latin typeface="D2Coding" panose="020B0609020101020101" pitchFamily="49" charset="-127"/>
+                <a:ea typeface="D2Coding" panose="020B0609020101020101" pitchFamily="49" charset="-127"/>
+              </a:rPr>
+              <a:t>도형</a:t>
+            </a:r>
+            <a:r>
+              <a:rPr lang="en-US" altLang="ko-KR" sz="1600" dirty="0">
+                <a:latin typeface="D2Coding" panose="020B0609020101020101" pitchFamily="49" charset="-127"/>
+                <a:ea typeface="D2Coding" panose="020B0609020101020101" pitchFamily="49" charset="-127"/>
+              </a:rPr>
+              <a:t>/</a:t>
+            </a:r>
+            <a:r>
+              <a:rPr lang="ko-KR" altLang="en-US" sz="1600" dirty="0">
+                <a:latin typeface="D2Coding" panose="020B0609020101020101" pitchFamily="49" charset="-127"/>
+                <a:ea typeface="D2Coding" panose="020B0609020101020101" pitchFamily="49" charset="-127"/>
+              </a:rPr>
+              <a:t>질감</a:t>
+            </a:r>
+            <a:r>
+              <a:rPr lang="en-US" altLang="ko-KR" sz="1600" dirty="0">
+                <a:latin typeface="D2Coding" panose="020B0609020101020101" pitchFamily="49" charset="-127"/>
+                <a:ea typeface="D2Coding" panose="020B0609020101020101" pitchFamily="49" charset="-127"/>
+              </a:rPr>
+              <a:t>(</a:t>
+            </a:r>
+            <a:r>
+              <a:rPr lang="ko-KR" altLang="en-US" sz="1600" dirty="0">
+                <a:latin typeface="D2Coding" panose="020B0609020101020101" pitchFamily="49" charset="-127"/>
+                <a:ea typeface="D2Coding" panose="020B0609020101020101" pitchFamily="49" charset="-127"/>
+              </a:rPr>
+              <a:t>중간</a:t>
+            </a:r>
+            <a:r>
+              <a:rPr lang="en-US" altLang="ko-KR" sz="1600" dirty="0">
+                <a:latin typeface="D2Coding" panose="020B0609020101020101" pitchFamily="49" charset="-127"/>
+                <a:ea typeface="D2Coding" panose="020B0609020101020101" pitchFamily="49" charset="-127"/>
+              </a:rPr>
+              <a:t>) </a:t>
+            </a:r>
+            <a:r>
+              <a:rPr lang="en-US" altLang="ko-KR" sz="1600" dirty="0">
+                <a:latin typeface="D2Coding" panose="020B0609020101020101" pitchFamily="49" charset="-127"/>
+                <a:ea typeface="D2Coding" panose="020B0609020101020101" pitchFamily="49" charset="-127"/>
+                <a:sym typeface="Wingdings" panose="05000000000000000000" pitchFamily="2" charset="2"/>
+              </a:rPr>
+              <a:t> </a:t>
+            </a:r>
+            <a:r>
+              <a:rPr lang="ko-KR" altLang="en-US" sz="1600" dirty="0">
+                <a:latin typeface="D2Coding" panose="020B0609020101020101" pitchFamily="49" charset="-127"/>
+                <a:ea typeface="D2Coding" panose="020B0609020101020101" pitchFamily="49" charset="-127"/>
+              </a:rPr>
+              <a:t>부품</a:t>
+            </a:r>
+            <a:r>
+              <a:rPr lang="en-US" altLang="ko-KR" sz="1600" dirty="0">
+                <a:latin typeface="D2Coding" panose="020B0609020101020101" pitchFamily="49" charset="-127"/>
+                <a:ea typeface="D2Coding" panose="020B0609020101020101" pitchFamily="49" charset="-127"/>
+              </a:rPr>
+              <a:t>/</a:t>
+            </a:r>
+            <a:r>
+              <a:rPr lang="ko-KR" altLang="en-US" sz="1600" dirty="0">
+                <a:latin typeface="D2Coding" panose="020B0609020101020101" pitchFamily="49" charset="-127"/>
+                <a:ea typeface="D2Coding" panose="020B0609020101020101" pitchFamily="49" charset="-127"/>
+              </a:rPr>
+              <a:t>형태</a:t>
+            </a:r>
+            <a:r>
+              <a:rPr lang="en-US" altLang="ko-KR" sz="1600" dirty="0">
+                <a:latin typeface="D2Coding" panose="020B0609020101020101" pitchFamily="49" charset="-127"/>
+                <a:ea typeface="D2Coding" panose="020B0609020101020101" pitchFamily="49" charset="-127"/>
+              </a:rPr>
+              <a:t>(</a:t>
+            </a:r>
+            <a:r>
+              <a:rPr lang="ko-KR" altLang="en-US" sz="1600" dirty="0">
+                <a:latin typeface="D2Coding" panose="020B0609020101020101" pitchFamily="49" charset="-127"/>
+                <a:ea typeface="D2Coding" panose="020B0609020101020101" pitchFamily="49" charset="-127"/>
+              </a:rPr>
+              <a:t>상위</a:t>
+            </a:r>
+            <a:r>
+              <a:rPr lang="en-US" altLang="ko-KR" sz="1600" dirty="0">
+                <a:latin typeface="D2Coding" panose="020B0609020101020101" pitchFamily="49" charset="-127"/>
+                <a:ea typeface="D2Coding" panose="020B0609020101020101" pitchFamily="49" charset="-127"/>
+              </a:rPr>
+              <a:t>) </a:t>
+            </a:r>
+            <a:r>
+              <a:rPr lang="en-US" altLang="ko-KR" sz="1600" dirty="0">
+                <a:latin typeface="D2Coding" panose="020B0609020101020101" pitchFamily="49" charset="-127"/>
+                <a:ea typeface="D2Coding" panose="020B0609020101020101" pitchFamily="49" charset="-127"/>
+                <a:sym typeface="Wingdings" panose="05000000000000000000" pitchFamily="2" charset="2"/>
+              </a:rPr>
+              <a:t></a:t>
+            </a:r>
+            <a:r>
+              <a:rPr lang="en-US" altLang="ko-KR" sz="1600" dirty="0">
+                <a:latin typeface="D2Coding" panose="020B0609020101020101" pitchFamily="49" charset="-127"/>
+                <a:ea typeface="D2Coding" panose="020B0609020101020101" pitchFamily="49" charset="-127"/>
+              </a:rPr>
+              <a:t> </a:t>
+            </a:r>
+            <a:r>
+              <a:rPr lang="ko-KR" altLang="en-US" sz="1600" dirty="0">
+                <a:latin typeface="D2Coding" panose="020B0609020101020101" pitchFamily="49" charset="-127"/>
+                <a:ea typeface="D2Coding" panose="020B0609020101020101" pitchFamily="49" charset="-127"/>
+              </a:rPr>
+              <a:t>개념 분류</a:t>
+            </a:r>
+            <a:r>
+              <a:rPr lang="en-US" altLang="ko-KR" sz="1600" dirty="0">
+                <a:latin typeface="D2Coding" panose="020B0609020101020101" pitchFamily="49" charset="-127"/>
+                <a:ea typeface="D2Coding" panose="020B0609020101020101" pitchFamily="49" charset="-127"/>
+              </a:rPr>
+              <a:t>(</a:t>
+            </a:r>
+            <a:r>
+              <a:rPr lang="ko-KR" altLang="en-US" sz="1600" dirty="0">
+                <a:latin typeface="D2Coding" panose="020B0609020101020101" pitchFamily="49" charset="-127"/>
+                <a:ea typeface="D2Coding" panose="020B0609020101020101" pitchFamily="49" charset="-127"/>
+              </a:rPr>
+              <a:t>최종</a:t>
+            </a:r>
+            <a:r>
+              <a:rPr lang="en-US" altLang="ko-KR" sz="1600" dirty="0">
+                <a:latin typeface="D2Coding" panose="020B0609020101020101" pitchFamily="49" charset="-127"/>
+                <a:ea typeface="D2Coding" panose="020B0609020101020101" pitchFamily="49" charset="-127"/>
+              </a:rPr>
+              <a:t>)] </a:t>
+            </a:r>
+            <a:r>
+              <a:rPr lang="ko-KR" altLang="en-US" sz="1600" dirty="0">
+                <a:latin typeface="D2Coding" panose="020B0609020101020101" pitchFamily="49" charset="-127"/>
+                <a:ea typeface="D2Coding" panose="020B0609020101020101" pitchFamily="49" charset="-127"/>
+              </a:rPr>
+              <a:t>순서로 고차원적인 추상화를 거치며 이미지를 해석하고 인지 분류</a:t>
+            </a:r>
+            <a:endParaRPr lang="en-US" altLang="ko-KR" sz="1600" dirty="0">
+              <a:latin typeface="D2Coding" panose="020B0609020101020101" pitchFamily="49" charset="-127"/>
+              <a:ea typeface="D2Coding" panose="020B0609020101020101" pitchFamily="49" charset="-127"/>
+            </a:endParaRPr>
+          </a:p>
+          <a:p>
+            <a:pPr fontAlgn="base">
+              <a:lnSpc>
+                <a:spcPct val="150000"/>
+              </a:lnSpc>
+              <a:spcBef>
+                <a:spcPct val="0"/>
+              </a:spcBef>
+              <a:spcAft>
+                <a:spcPct val="0"/>
+              </a:spcAft>
+            </a:pPr>
+            <a:endParaRPr lang="en-US" altLang="ko-KR" sz="1400" dirty="0">
+              <a:latin typeface="D2Coding" panose="020B0609020101020101" pitchFamily="49" charset="-127"/>
+              <a:ea typeface="D2Coding" panose="020B0609020101020101" pitchFamily="49" charset="-127"/>
+            </a:endParaRPr>
+          </a:p>
+          <a:p>
+            <a:pPr marL="285750" lvl="0" indent="-285750" fontAlgn="base">
+              <a:lnSpc>
+                <a:spcPct val="150000"/>
+              </a:lnSpc>
+              <a:spcBef>
+                <a:spcPct val="0"/>
+              </a:spcBef>
+              <a:spcAft>
+                <a:spcPct val="0"/>
+              </a:spcAft>
+              <a:buFont typeface="Wingdings" panose="05000000000000000000" pitchFamily="2" charset="2"/>
+              <a:buChar char="v"/>
+            </a:pPr>
+            <a:r>
+              <a:rPr lang="en-US" altLang="ko-KR" sz="1400" dirty="0">
+                <a:latin typeface="D2Coding" panose="020B0609020101020101" pitchFamily="49" charset="-127"/>
+                <a:ea typeface="D2Coding" panose="020B0609020101020101" pitchFamily="49" charset="-127"/>
+              </a:rPr>
+              <a:t>1</a:t>
+            </a:r>
+            <a:r>
+              <a:rPr lang="ko-KR" altLang="en-US" sz="1400" dirty="0">
+                <a:latin typeface="D2Coding" panose="020B0609020101020101" pitchFamily="49" charset="-127"/>
+                <a:ea typeface="D2Coding" panose="020B0609020101020101" pitchFamily="49" charset="-127"/>
+              </a:rPr>
+              <a:t>단계 </a:t>
+            </a:r>
+            <a:r>
+              <a:rPr lang="en-US" altLang="ko-KR" sz="1400" dirty="0">
+                <a:latin typeface="D2Coding" panose="020B0609020101020101" pitchFamily="49" charset="-127"/>
+                <a:ea typeface="D2Coding" panose="020B0609020101020101" pitchFamily="49" charset="-127"/>
+              </a:rPr>
+              <a:t>: </a:t>
+            </a:r>
+            <a:r>
+              <a:rPr lang="ko-KR" altLang="en-US" sz="1400" dirty="0">
+                <a:latin typeface="D2Coding" panose="020B0609020101020101" pitchFamily="49" charset="-127"/>
+                <a:ea typeface="D2Coding" panose="020B0609020101020101" pitchFamily="49" charset="-127"/>
+              </a:rPr>
+              <a:t>선과 경계면 찾기 </a:t>
+            </a:r>
+            <a:r>
+              <a:rPr lang="en-US" altLang="ko-KR" sz="1400" dirty="0">
+                <a:latin typeface="D2Coding" panose="020B0609020101020101" pitchFamily="49" charset="-127"/>
+                <a:ea typeface="D2Coding" panose="020B0609020101020101" pitchFamily="49" charset="-127"/>
+              </a:rPr>
+              <a:t>(</a:t>
+            </a:r>
+            <a:r>
+              <a:rPr lang="ko-KR" altLang="en-US" sz="1400" dirty="0">
+                <a:latin typeface="D2Coding" panose="020B0609020101020101" pitchFamily="49" charset="-127"/>
+                <a:ea typeface="D2Coding" panose="020B0609020101020101" pitchFamily="49" charset="-127"/>
+              </a:rPr>
+              <a:t>초기 레이어</a:t>
+            </a:r>
+            <a:r>
+              <a:rPr lang="en-US" altLang="ko-KR" sz="1400" dirty="0">
+                <a:latin typeface="D2Coding" panose="020B0609020101020101" pitchFamily="49" charset="-127"/>
+                <a:ea typeface="D2Coding" panose="020B0609020101020101" pitchFamily="49" charset="-127"/>
+              </a:rPr>
+              <a:t>)</a:t>
+            </a:r>
+            <a:r>
+              <a:rPr lang="ko-KR" altLang="en-US" sz="1400" dirty="0">
+                <a:latin typeface="D2Coding" panose="020B0609020101020101" pitchFamily="49" charset="-127"/>
+                <a:ea typeface="D2Coding" panose="020B0609020101020101" pitchFamily="49" charset="-127"/>
+              </a:rPr>
+              <a:t>뇌 </a:t>
+            </a:r>
+            <a:r>
+              <a:rPr lang="en-US" altLang="ko-KR" sz="1400" dirty="0">
+                <a:latin typeface="D2Coding" panose="020B0609020101020101" pitchFamily="49" charset="-127"/>
+                <a:ea typeface="D2Coding" panose="020B0609020101020101" pitchFamily="49" charset="-127"/>
+              </a:rPr>
+              <a:t>(V1 </a:t>
+            </a:r>
+            <a:r>
+              <a:rPr lang="ko-KR" altLang="en-US" sz="1400" dirty="0">
+                <a:latin typeface="D2Coding" panose="020B0609020101020101" pitchFamily="49" charset="-127"/>
+                <a:ea typeface="D2Coding" panose="020B0609020101020101" pitchFamily="49" charset="-127"/>
+              </a:rPr>
+              <a:t>영역</a:t>
+            </a:r>
+            <a:r>
+              <a:rPr lang="en-US" altLang="ko-KR" sz="1400" dirty="0">
+                <a:latin typeface="D2Coding" panose="020B0609020101020101" pitchFamily="49" charset="-127"/>
+                <a:ea typeface="D2Coding" panose="020B0609020101020101" pitchFamily="49" charset="-127"/>
+              </a:rPr>
+              <a:t>): </a:t>
+            </a:r>
+            <a:r>
+              <a:rPr lang="ko-KR" altLang="en-US" sz="1400" dirty="0">
+                <a:latin typeface="D2Coding" panose="020B0609020101020101" pitchFamily="49" charset="-127"/>
+                <a:ea typeface="D2Coding" panose="020B0609020101020101" pitchFamily="49" charset="-127"/>
+              </a:rPr>
+              <a:t>눈으로 들어온 시각 정보에서 가장 기본적인 선</a:t>
+            </a:r>
+            <a:r>
+              <a:rPr lang="en-US" altLang="ko-KR" sz="1400" dirty="0">
+                <a:latin typeface="D2Coding" panose="020B0609020101020101" pitchFamily="49" charset="-127"/>
+                <a:ea typeface="D2Coding" panose="020B0609020101020101" pitchFamily="49" charset="-127"/>
+              </a:rPr>
+              <a:t>(Line), </a:t>
+            </a:r>
+            <a:r>
+              <a:rPr lang="ko-KR" altLang="en-US" sz="1400" dirty="0">
+                <a:latin typeface="D2Coding" panose="020B0609020101020101" pitchFamily="49" charset="-127"/>
+                <a:ea typeface="D2Coding" panose="020B0609020101020101" pitchFamily="49" charset="-127"/>
+              </a:rPr>
+              <a:t>에지</a:t>
+            </a:r>
+            <a:r>
+              <a:rPr lang="en-US" altLang="ko-KR" sz="1400" dirty="0">
+                <a:latin typeface="D2Coding" panose="020B0609020101020101" pitchFamily="49" charset="-127"/>
+                <a:ea typeface="D2Coding" panose="020B0609020101020101" pitchFamily="49" charset="-127"/>
+              </a:rPr>
+              <a:t>(Edge), </a:t>
+            </a:r>
+            <a:r>
+              <a:rPr lang="ko-KR" altLang="en-US" sz="1400" dirty="0">
+                <a:latin typeface="D2Coding" panose="020B0609020101020101" pitchFamily="49" charset="-127"/>
+                <a:ea typeface="D2Coding" panose="020B0609020101020101" pitchFamily="49" charset="-127"/>
+              </a:rPr>
+              <a:t>명암을 인식</a:t>
+            </a:r>
+            <a:r>
+              <a:rPr lang="en-US" altLang="ko-KR" sz="1400" dirty="0">
+                <a:latin typeface="D2Coding" panose="020B0609020101020101" pitchFamily="49" charset="-127"/>
+                <a:ea typeface="D2Coding" panose="020B0609020101020101" pitchFamily="49" charset="-127"/>
+              </a:rPr>
+              <a:t>(</a:t>
+            </a:r>
+            <a:r>
+              <a:rPr lang="en-US" altLang="ko-KR" sz="1400" dirty="0" err="1">
+                <a:latin typeface="D2Coding" panose="020B0609020101020101" pitchFamily="49" charset="-127"/>
+                <a:ea typeface="D2Coding" panose="020B0609020101020101" pitchFamily="49" charset="-127"/>
+              </a:rPr>
+              <a:t>Convet</a:t>
+            </a:r>
+            <a:r>
+              <a:rPr lang="en-US" altLang="ko-KR" sz="1400" dirty="0">
+                <a:latin typeface="D2Coding" panose="020B0609020101020101" pitchFamily="49" charset="-127"/>
+                <a:ea typeface="D2Coding" panose="020B0609020101020101" pitchFamily="49" charset="-127"/>
+              </a:rPr>
+              <a:t>_</a:t>
+            </a:r>
+            <a:r>
+              <a:rPr lang="ko-KR" altLang="en-US" sz="1400" dirty="0">
+                <a:latin typeface="D2Coding" panose="020B0609020101020101" pitchFamily="49" charset="-127"/>
+                <a:ea typeface="D2Coding" panose="020B0609020101020101" pitchFamily="49" charset="-127"/>
+              </a:rPr>
+              <a:t>초기 </a:t>
+            </a:r>
+            <a:r>
+              <a:rPr lang="en-US" altLang="ko-KR" sz="1400" dirty="0">
+                <a:latin typeface="D2Coding" panose="020B0609020101020101" pitchFamily="49" charset="-127"/>
+                <a:ea typeface="D2Coding" panose="020B0609020101020101" pitchFamily="49" charset="-127"/>
+              </a:rPr>
+              <a:t>Conv</a:t>
+            </a:r>
+            <a:r>
+              <a:rPr lang="ko-KR" altLang="en-US" sz="1400" dirty="0">
+                <a:latin typeface="D2Coding" panose="020B0609020101020101" pitchFamily="49" charset="-127"/>
+                <a:ea typeface="D2Coding" panose="020B0609020101020101" pitchFamily="49" charset="-127"/>
+              </a:rPr>
+              <a:t>층</a:t>
+            </a:r>
+            <a:r>
+              <a:rPr lang="en-US" altLang="ko-KR" sz="1400" dirty="0">
+                <a:latin typeface="D2Coding" panose="020B0609020101020101" pitchFamily="49" charset="-127"/>
+                <a:ea typeface="D2Coding" panose="020B0609020101020101" pitchFamily="49" charset="-127"/>
+              </a:rPr>
+              <a:t>: </a:t>
+            </a:r>
+            <a:r>
+              <a:rPr lang="ko-KR" altLang="en-US" sz="1400" dirty="0">
+                <a:latin typeface="D2Coding" panose="020B0609020101020101" pitchFamily="49" charset="-127"/>
+                <a:ea typeface="D2Coding" panose="020B0609020101020101" pitchFamily="49" charset="-127"/>
+              </a:rPr>
+              <a:t>작은 필터를 통해 이미지 픽셀에서 가로</a:t>
+            </a:r>
+            <a:r>
+              <a:rPr lang="en-US" altLang="ko-KR" sz="1400" dirty="0">
+                <a:latin typeface="D2Coding" panose="020B0609020101020101" pitchFamily="49" charset="-127"/>
+                <a:ea typeface="D2Coding" panose="020B0609020101020101" pitchFamily="49" charset="-127"/>
+              </a:rPr>
+              <a:t>·</a:t>
+            </a:r>
+            <a:r>
+              <a:rPr lang="ko-KR" altLang="en-US" sz="1400" dirty="0">
+                <a:latin typeface="D2Coding" panose="020B0609020101020101" pitchFamily="49" charset="-127"/>
+                <a:ea typeface="D2Coding" panose="020B0609020101020101" pitchFamily="49" charset="-127"/>
+              </a:rPr>
+              <a:t>세로</a:t>
+            </a:r>
+            <a:r>
+              <a:rPr lang="en-US" altLang="ko-KR" sz="1400" dirty="0">
+                <a:latin typeface="D2Coding" panose="020B0609020101020101" pitchFamily="49" charset="-127"/>
+                <a:ea typeface="D2Coding" panose="020B0609020101020101" pitchFamily="49" charset="-127"/>
+              </a:rPr>
+              <a:t>·</a:t>
+            </a:r>
+            <a:r>
+              <a:rPr lang="ko-KR" altLang="en-US" sz="1400" dirty="0">
+                <a:latin typeface="D2Coding" panose="020B0609020101020101" pitchFamily="49" charset="-127"/>
+                <a:ea typeface="D2Coding" panose="020B0609020101020101" pitchFamily="49" charset="-127"/>
+              </a:rPr>
+              <a:t>대각선 등의 경계선 특징을 추출</a:t>
+            </a:r>
+            <a:r>
+              <a:rPr lang="en-US" altLang="ko-KR" sz="1400" dirty="0">
+                <a:latin typeface="D2Coding" panose="020B0609020101020101" pitchFamily="49" charset="-127"/>
+                <a:ea typeface="D2Coding" panose="020B0609020101020101" pitchFamily="49" charset="-127"/>
+              </a:rPr>
+              <a:t>)</a:t>
+            </a:r>
+          </a:p>
+          <a:p>
+            <a:pPr marL="285750" lvl="0" indent="-285750" fontAlgn="base">
+              <a:lnSpc>
+                <a:spcPct val="150000"/>
+              </a:lnSpc>
+              <a:spcBef>
+                <a:spcPct val="0"/>
+              </a:spcBef>
+              <a:spcAft>
+                <a:spcPct val="0"/>
+              </a:spcAft>
+              <a:buFont typeface="Wingdings" panose="05000000000000000000" pitchFamily="2" charset="2"/>
+              <a:buChar char="v"/>
+            </a:pPr>
+            <a:endParaRPr lang="en-US" altLang="ko-KR" sz="600" dirty="0">
+              <a:latin typeface="D2Coding" panose="020B0609020101020101" pitchFamily="49" charset="-127"/>
+              <a:ea typeface="D2Coding" panose="020B0609020101020101" pitchFamily="49" charset="-127"/>
+            </a:endParaRPr>
+          </a:p>
+          <a:p>
+            <a:pPr marL="285750" indent="-285750" fontAlgn="base">
+              <a:lnSpc>
+                <a:spcPct val="150000"/>
+              </a:lnSpc>
+              <a:spcBef>
+                <a:spcPct val="0"/>
+              </a:spcBef>
+              <a:spcAft>
+                <a:spcPct val="0"/>
+              </a:spcAft>
+              <a:buFont typeface="Wingdings" panose="05000000000000000000" pitchFamily="2" charset="2"/>
+              <a:buChar char="v"/>
+            </a:pPr>
+            <a:r>
+              <a:rPr lang="en-US" altLang="ko-KR" sz="1400" dirty="0">
+                <a:latin typeface="D2Coding" panose="020B0609020101020101" pitchFamily="49" charset="-127"/>
+                <a:ea typeface="D2Coding" panose="020B0609020101020101" pitchFamily="49" charset="-127"/>
+              </a:rPr>
+              <a:t>2</a:t>
+            </a:r>
+            <a:r>
+              <a:rPr lang="ko-KR" altLang="en-US" sz="1400" dirty="0">
+                <a:latin typeface="D2Coding" panose="020B0609020101020101" pitchFamily="49" charset="-127"/>
+                <a:ea typeface="D2Coding" panose="020B0609020101020101" pitchFamily="49" charset="-127"/>
+              </a:rPr>
+              <a:t>단계 </a:t>
+            </a:r>
+            <a:r>
+              <a:rPr lang="en-US" altLang="ko-KR" sz="1400" dirty="0">
+                <a:latin typeface="D2Coding" panose="020B0609020101020101" pitchFamily="49" charset="-127"/>
+                <a:ea typeface="D2Coding" panose="020B0609020101020101" pitchFamily="49" charset="-127"/>
+              </a:rPr>
+              <a:t>: </a:t>
+            </a:r>
+            <a:r>
+              <a:rPr lang="ko-KR" altLang="en-US" sz="1400" dirty="0">
+                <a:latin typeface="D2Coding" panose="020B0609020101020101" pitchFamily="49" charset="-127"/>
+                <a:ea typeface="D2Coding" panose="020B0609020101020101" pitchFamily="49" charset="-127"/>
+              </a:rPr>
+              <a:t>모양과 질감 만들기 </a:t>
+            </a:r>
+            <a:r>
+              <a:rPr lang="en-US" altLang="ko-KR" sz="1400" dirty="0">
+                <a:latin typeface="D2Coding" panose="020B0609020101020101" pitchFamily="49" charset="-127"/>
+                <a:ea typeface="D2Coding" panose="020B0609020101020101" pitchFamily="49" charset="-127"/>
+              </a:rPr>
+              <a:t>(</a:t>
+            </a:r>
+            <a:r>
+              <a:rPr lang="ko-KR" altLang="en-US" sz="1400" dirty="0">
+                <a:latin typeface="D2Coding" panose="020B0609020101020101" pitchFamily="49" charset="-127"/>
+                <a:ea typeface="D2Coding" panose="020B0609020101020101" pitchFamily="49" charset="-127"/>
+              </a:rPr>
+              <a:t>중간 레이어</a:t>
+            </a:r>
+            <a:r>
+              <a:rPr lang="en-US" altLang="ko-KR" sz="1400" dirty="0">
+                <a:latin typeface="D2Coding" panose="020B0609020101020101" pitchFamily="49" charset="-127"/>
+                <a:ea typeface="D2Coding" panose="020B0609020101020101" pitchFamily="49" charset="-127"/>
+              </a:rPr>
+              <a:t>)</a:t>
+            </a:r>
+            <a:r>
+              <a:rPr lang="ko-KR" altLang="en-US" sz="1400" dirty="0">
+                <a:latin typeface="D2Coding" panose="020B0609020101020101" pitchFamily="49" charset="-127"/>
+                <a:ea typeface="D2Coding" panose="020B0609020101020101" pitchFamily="49" charset="-127"/>
+              </a:rPr>
+              <a:t>뇌 </a:t>
+            </a:r>
+            <a:r>
+              <a:rPr lang="en-US" altLang="ko-KR" sz="1400" dirty="0">
+                <a:latin typeface="D2Coding" panose="020B0609020101020101" pitchFamily="49" charset="-127"/>
+                <a:ea typeface="D2Coding" panose="020B0609020101020101" pitchFamily="49" charset="-127"/>
+              </a:rPr>
+              <a:t>(V2 ~ V4 </a:t>
+            </a:r>
+            <a:r>
+              <a:rPr lang="ko-KR" altLang="en-US" sz="1400" dirty="0">
+                <a:latin typeface="D2Coding" panose="020B0609020101020101" pitchFamily="49" charset="-127"/>
+                <a:ea typeface="D2Coding" panose="020B0609020101020101" pitchFamily="49" charset="-127"/>
+              </a:rPr>
+              <a:t>영역</a:t>
+            </a:r>
+            <a:r>
+              <a:rPr lang="en-US" altLang="ko-KR" sz="1400" dirty="0">
+                <a:latin typeface="D2Coding" panose="020B0609020101020101" pitchFamily="49" charset="-127"/>
+                <a:ea typeface="D2Coding" panose="020B0609020101020101" pitchFamily="49" charset="-127"/>
+              </a:rPr>
+              <a:t>): 1</a:t>
+            </a:r>
+            <a:r>
+              <a:rPr lang="ko-KR" altLang="en-US" sz="1400" dirty="0">
+                <a:latin typeface="D2Coding" panose="020B0609020101020101" pitchFamily="49" charset="-127"/>
+                <a:ea typeface="D2Coding" panose="020B0609020101020101" pitchFamily="49" charset="-127"/>
+              </a:rPr>
+              <a:t>단계의 선들을 조합하여 곡선</a:t>
+            </a:r>
+            <a:r>
+              <a:rPr lang="en-US" altLang="ko-KR" sz="1400" dirty="0">
+                <a:latin typeface="D2Coding" panose="020B0609020101020101" pitchFamily="49" charset="-127"/>
+                <a:ea typeface="D2Coding" panose="020B0609020101020101" pitchFamily="49" charset="-127"/>
+              </a:rPr>
+              <a:t>, </a:t>
+            </a:r>
+            <a:r>
+              <a:rPr lang="ko-KR" altLang="en-US" sz="1400" dirty="0">
+                <a:latin typeface="D2Coding" panose="020B0609020101020101" pitchFamily="49" charset="-127"/>
+                <a:ea typeface="D2Coding" panose="020B0609020101020101" pitchFamily="49" charset="-127"/>
+              </a:rPr>
+              <a:t>간단한 도형</a:t>
+            </a:r>
+            <a:r>
+              <a:rPr lang="en-US" altLang="ko-KR" sz="1400" dirty="0">
+                <a:latin typeface="D2Coding" panose="020B0609020101020101" pitchFamily="49" charset="-127"/>
+                <a:ea typeface="D2Coding" panose="020B0609020101020101" pitchFamily="49" charset="-127"/>
+              </a:rPr>
+              <a:t>, </a:t>
+            </a:r>
+            <a:r>
+              <a:rPr lang="ko-KR" altLang="en-US" sz="1400" dirty="0">
+                <a:latin typeface="D2Coding" panose="020B0609020101020101" pitchFamily="49" charset="-127"/>
+                <a:ea typeface="D2Coding" panose="020B0609020101020101" pitchFamily="49" charset="-127"/>
+              </a:rPr>
+              <a:t>표면의 질감과 색상을 파악</a:t>
+            </a:r>
+            <a:r>
+              <a:rPr lang="en-US" altLang="ko-KR" sz="1400" dirty="0">
+                <a:latin typeface="D2Coding" panose="020B0609020101020101" pitchFamily="49" charset="-127"/>
+                <a:ea typeface="D2Coding" panose="020B0609020101020101" pitchFamily="49" charset="-127"/>
+              </a:rPr>
+              <a:t>(</a:t>
+            </a:r>
+            <a:r>
+              <a:rPr lang="en-US" altLang="ko-KR" sz="1400" dirty="0" err="1">
+                <a:latin typeface="D2Coding" panose="020B0609020101020101" pitchFamily="49" charset="-127"/>
+                <a:ea typeface="D2Coding" panose="020B0609020101020101" pitchFamily="49" charset="-127"/>
+              </a:rPr>
+              <a:t>Convet</a:t>
+            </a:r>
+            <a:r>
+              <a:rPr lang="en-US" altLang="ko-KR" sz="1400" dirty="0">
+                <a:latin typeface="D2Coding" panose="020B0609020101020101" pitchFamily="49" charset="-127"/>
+                <a:ea typeface="D2Coding" panose="020B0609020101020101" pitchFamily="49" charset="-127"/>
+              </a:rPr>
+              <a:t>_</a:t>
+            </a:r>
+            <a:r>
+              <a:rPr lang="ko-KR" altLang="en-US" sz="1400" dirty="0">
+                <a:latin typeface="D2Coding" panose="020B0609020101020101" pitchFamily="49" charset="-127"/>
+                <a:ea typeface="D2Coding" panose="020B0609020101020101" pitchFamily="49" charset="-127"/>
+              </a:rPr>
+              <a:t>중간 </a:t>
+            </a:r>
+            <a:r>
+              <a:rPr lang="en-US" altLang="ko-KR" sz="1400" dirty="0">
+                <a:latin typeface="D2Coding" panose="020B0609020101020101" pitchFamily="49" charset="-127"/>
+                <a:ea typeface="D2Coding" panose="020B0609020101020101" pitchFamily="49" charset="-127"/>
+              </a:rPr>
+              <a:t>Conv</a:t>
+            </a:r>
+            <a:r>
+              <a:rPr lang="ko-KR" altLang="en-US" sz="1400" dirty="0">
+                <a:latin typeface="D2Coding" panose="020B0609020101020101" pitchFamily="49" charset="-127"/>
+                <a:ea typeface="D2Coding" panose="020B0609020101020101" pitchFamily="49" charset="-127"/>
+              </a:rPr>
+              <a:t>층</a:t>
+            </a:r>
+            <a:r>
+              <a:rPr lang="en-US" altLang="ko-KR" sz="1400" dirty="0">
+                <a:latin typeface="D2Coding" panose="020B0609020101020101" pitchFamily="49" charset="-127"/>
+                <a:ea typeface="D2Coding" panose="020B0609020101020101" pitchFamily="49" charset="-127"/>
+              </a:rPr>
+              <a:t>: </a:t>
+            </a:r>
+            <a:r>
+              <a:rPr lang="ko-KR" altLang="en-US" sz="1400" dirty="0">
+                <a:latin typeface="D2Coding" panose="020B0609020101020101" pitchFamily="49" charset="-127"/>
+                <a:ea typeface="D2Coding" panose="020B0609020101020101" pitchFamily="49" charset="-127"/>
+              </a:rPr>
+              <a:t>추출된 선들을 결합하여 모서리</a:t>
+            </a:r>
+            <a:r>
+              <a:rPr lang="en-US" altLang="ko-KR" sz="1400" dirty="0">
+                <a:latin typeface="D2Coding" panose="020B0609020101020101" pitchFamily="49" charset="-127"/>
+                <a:ea typeface="D2Coding" panose="020B0609020101020101" pitchFamily="49" charset="-127"/>
+              </a:rPr>
+              <a:t>, </a:t>
+            </a:r>
+            <a:r>
+              <a:rPr lang="ko-KR" altLang="en-US" sz="1400" dirty="0">
+                <a:latin typeface="D2Coding" panose="020B0609020101020101" pitchFamily="49" charset="-127"/>
+                <a:ea typeface="D2Coding" panose="020B0609020101020101" pitchFamily="49" charset="-127"/>
+              </a:rPr>
+              <a:t>원형</a:t>
+            </a:r>
+            <a:r>
+              <a:rPr lang="en-US" altLang="ko-KR" sz="1400" dirty="0">
+                <a:latin typeface="D2Coding" panose="020B0609020101020101" pitchFamily="49" charset="-127"/>
+                <a:ea typeface="D2Coding" panose="020B0609020101020101" pitchFamily="49" charset="-127"/>
+              </a:rPr>
+              <a:t>, </a:t>
+            </a:r>
+            <a:r>
+              <a:rPr lang="ko-KR" altLang="en-US" sz="1400" dirty="0">
+                <a:latin typeface="D2Coding" panose="020B0609020101020101" pitchFamily="49" charset="-127"/>
+                <a:ea typeface="D2Coding" panose="020B0609020101020101" pitchFamily="49" charset="-127"/>
+              </a:rPr>
+              <a:t>반복되는 패턴 등의 특징 </a:t>
+            </a:r>
+            <a:r>
+              <a:rPr lang="ko-KR" altLang="en-US" sz="1400" dirty="0" err="1">
+                <a:latin typeface="D2Coding" panose="020B0609020101020101" pitchFamily="49" charset="-127"/>
+                <a:ea typeface="D2Coding" panose="020B0609020101020101" pitchFamily="49" charset="-127"/>
+              </a:rPr>
+              <a:t>맵을</a:t>
+            </a:r>
+            <a:r>
+              <a:rPr lang="ko-KR" altLang="en-US" sz="1400" dirty="0">
+                <a:latin typeface="D2Coding" panose="020B0609020101020101" pitchFamily="49" charset="-127"/>
+                <a:ea typeface="D2Coding" panose="020B0609020101020101" pitchFamily="49" charset="-127"/>
+              </a:rPr>
+              <a:t> 형성</a:t>
+            </a:r>
+            <a:r>
+              <a:rPr lang="en-US" altLang="ko-KR" sz="1400" dirty="0">
+                <a:latin typeface="D2Coding" panose="020B0609020101020101" pitchFamily="49" charset="-127"/>
+                <a:ea typeface="D2Coding" panose="020B0609020101020101" pitchFamily="49" charset="-127"/>
+              </a:rPr>
+              <a:t>)</a:t>
+            </a:r>
+          </a:p>
+          <a:p>
+            <a:pPr lvl="0" fontAlgn="base">
+              <a:lnSpc>
+                <a:spcPct val="150000"/>
+              </a:lnSpc>
+              <a:spcBef>
+                <a:spcPct val="0"/>
+              </a:spcBef>
+              <a:spcAft>
+                <a:spcPct val="0"/>
+              </a:spcAft>
+            </a:pPr>
+            <a:endParaRPr lang="en-US" altLang="ko-KR" sz="500" dirty="0">
+              <a:latin typeface="D2Coding" panose="020B0609020101020101" pitchFamily="49" charset="-127"/>
+              <a:ea typeface="D2Coding" panose="020B0609020101020101" pitchFamily="49" charset="-127"/>
+            </a:endParaRPr>
+          </a:p>
+          <a:p>
+            <a:pPr marL="285750" lvl="0" indent="-285750" fontAlgn="base">
+              <a:lnSpc>
+                <a:spcPct val="150000"/>
+              </a:lnSpc>
+              <a:spcBef>
+                <a:spcPct val="0"/>
+              </a:spcBef>
+              <a:spcAft>
+                <a:spcPct val="0"/>
+              </a:spcAft>
+              <a:buFont typeface="Wingdings" panose="05000000000000000000" pitchFamily="2" charset="2"/>
+              <a:buChar char="v"/>
+            </a:pPr>
+            <a:r>
+              <a:rPr lang="en-US" altLang="ko-KR" sz="1400" dirty="0">
+                <a:latin typeface="D2Coding" panose="020B0609020101020101" pitchFamily="49" charset="-127"/>
+                <a:ea typeface="D2Coding" panose="020B0609020101020101" pitchFamily="49" charset="-127"/>
+              </a:rPr>
+              <a:t>3</a:t>
+            </a:r>
+            <a:r>
+              <a:rPr lang="ko-KR" altLang="en-US" sz="1400" dirty="0">
+                <a:latin typeface="D2Coding" panose="020B0609020101020101" pitchFamily="49" charset="-127"/>
+                <a:ea typeface="D2Coding" panose="020B0609020101020101" pitchFamily="49" charset="-127"/>
+              </a:rPr>
+              <a:t>단계 </a:t>
+            </a:r>
+            <a:r>
+              <a:rPr lang="en-US" altLang="ko-KR" sz="1400" dirty="0">
+                <a:latin typeface="D2Coding" panose="020B0609020101020101" pitchFamily="49" charset="-127"/>
+                <a:ea typeface="D2Coding" panose="020B0609020101020101" pitchFamily="49" charset="-127"/>
+              </a:rPr>
+              <a:t>: </a:t>
+            </a:r>
+            <a:r>
+              <a:rPr lang="ko-KR" altLang="en-US" sz="1400" dirty="0">
+                <a:latin typeface="D2Coding" panose="020B0609020101020101" pitchFamily="49" charset="-127"/>
+                <a:ea typeface="D2Coding" panose="020B0609020101020101" pitchFamily="49" charset="-127"/>
+              </a:rPr>
+              <a:t>사물의 부분 인식 </a:t>
+            </a:r>
+            <a:r>
+              <a:rPr lang="en-US" altLang="ko-KR" sz="1400" dirty="0">
+                <a:latin typeface="D2Coding" panose="020B0609020101020101" pitchFamily="49" charset="-127"/>
+                <a:ea typeface="D2Coding" panose="020B0609020101020101" pitchFamily="49" charset="-127"/>
+              </a:rPr>
+              <a:t>(</a:t>
+            </a:r>
+            <a:r>
+              <a:rPr lang="ko-KR" altLang="en-US" sz="1400" dirty="0">
+                <a:latin typeface="D2Coding" panose="020B0609020101020101" pitchFamily="49" charset="-127"/>
+                <a:ea typeface="D2Coding" panose="020B0609020101020101" pitchFamily="49" charset="-127"/>
+              </a:rPr>
+              <a:t>심층 레이어</a:t>
+            </a:r>
+            <a:r>
+              <a:rPr lang="en-US" altLang="ko-KR" sz="1400" dirty="0">
+                <a:latin typeface="D2Coding" panose="020B0609020101020101" pitchFamily="49" charset="-127"/>
+                <a:ea typeface="D2Coding" panose="020B0609020101020101" pitchFamily="49" charset="-127"/>
+              </a:rPr>
+              <a:t>)</a:t>
+            </a:r>
+            <a:r>
+              <a:rPr lang="ko-KR" altLang="en-US" sz="1400" dirty="0">
+                <a:latin typeface="D2Coding" panose="020B0609020101020101" pitchFamily="49" charset="-127"/>
+                <a:ea typeface="D2Coding" panose="020B0609020101020101" pitchFamily="49" charset="-127"/>
+              </a:rPr>
+              <a:t>뇌 </a:t>
+            </a:r>
+            <a:r>
+              <a:rPr lang="en-US" altLang="ko-KR" sz="1400" dirty="0">
+                <a:latin typeface="D2Coding" panose="020B0609020101020101" pitchFamily="49" charset="-127"/>
+                <a:ea typeface="D2Coding" panose="020B0609020101020101" pitchFamily="49" charset="-127"/>
+              </a:rPr>
+              <a:t>(IT </a:t>
+            </a:r>
+            <a:r>
+              <a:rPr lang="ko-KR" altLang="en-US" sz="1400" dirty="0">
+                <a:latin typeface="D2Coding" panose="020B0609020101020101" pitchFamily="49" charset="-127"/>
+                <a:ea typeface="D2Coding" panose="020B0609020101020101" pitchFamily="49" charset="-127"/>
+              </a:rPr>
+              <a:t>피질 후방</a:t>
+            </a:r>
+            <a:r>
+              <a:rPr lang="en-US" altLang="ko-KR" sz="1400" dirty="0">
+                <a:latin typeface="D2Coding" panose="020B0609020101020101" pitchFamily="49" charset="-127"/>
+                <a:ea typeface="D2Coding" panose="020B0609020101020101" pitchFamily="49" charset="-127"/>
+              </a:rPr>
+              <a:t>): </a:t>
+            </a:r>
+            <a:r>
+              <a:rPr lang="ko-KR" altLang="en-US" sz="1400" dirty="0">
+                <a:latin typeface="D2Coding" panose="020B0609020101020101" pitchFamily="49" charset="-127"/>
+                <a:ea typeface="D2Coding" panose="020B0609020101020101" pitchFamily="49" charset="-127"/>
+              </a:rPr>
+              <a:t>도형들을 합쳐 </a:t>
+            </a:r>
+            <a:r>
+              <a:rPr lang="en-US" altLang="ko-KR" sz="1400" dirty="0">
+                <a:latin typeface="D2Coding" panose="020B0609020101020101" pitchFamily="49" charset="-127"/>
+                <a:ea typeface="D2Coding" panose="020B0609020101020101" pitchFamily="49" charset="-127"/>
+              </a:rPr>
+              <a:t>'</a:t>
+            </a:r>
+            <a:r>
+              <a:rPr lang="ko-KR" altLang="en-US" sz="1400" dirty="0">
+                <a:latin typeface="D2Coding" panose="020B0609020101020101" pitchFamily="49" charset="-127"/>
+                <a:ea typeface="D2Coding" panose="020B0609020101020101" pitchFamily="49" charset="-127"/>
+              </a:rPr>
+              <a:t>바퀴</a:t>
+            </a:r>
+            <a:r>
+              <a:rPr lang="en-US" altLang="ko-KR" sz="1400" dirty="0">
+                <a:latin typeface="D2Coding" panose="020B0609020101020101" pitchFamily="49" charset="-127"/>
+                <a:ea typeface="D2Coding" panose="020B0609020101020101" pitchFamily="49" charset="-127"/>
+              </a:rPr>
+              <a:t>', '</a:t>
+            </a:r>
+            <a:r>
+              <a:rPr lang="ko-KR" altLang="en-US" sz="1400" dirty="0" err="1">
+                <a:latin typeface="D2Coding" panose="020B0609020101020101" pitchFamily="49" charset="-127"/>
+                <a:ea typeface="D2Coding" panose="020B0609020101020101" pitchFamily="49" charset="-127"/>
+              </a:rPr>
+              <a:t>눈코입</a:t>
+            </a:r>
+            <a:r>
+              <a:rPr lang="en-US" altLang="ko-KR" sz="1400" dirty="0">
+                <a:latin typeface="D2Coding" panose="020B0609020101020101" pitchFamily="49" charset="-127"/>
+                <a:ea typeface="D2Coding" panose="020B0609020101020101" pitchFamily="49" charset="-127"/>
+              </a:rPr>
+              <a:t>', '</a:t>
+            </a:r>
+            <a:r>
+              <a:rPr lang="ko-KR" altLang="en-US" sz="1400" dirty="0">
+                <a:latin typeface="D2Coding" panose="020B0609020101020101" pitchFamily="49" charset="-127"/>
+                <a:ea typeface="D2Coding" panose="020B0609020101020101" pitchFamily="49" charset="-127"/>
+              </a:rPr>
+              <a:t>동물 귀</a:t>
+            </a:r>
+            <a:r>
+              <a:rPr lang="en-US" altLang="ko-KR" sz="1400" dirty="0">
+                <a:latin typeface="D2Coding" panose="020B0609020101020101" pitchFamily="49" charset="-127"/>
+                <a:ea typeface="D2Coding" panose="020B0609020101020101" pitchFamily="49" charset="-127"/>
+              </a:rPr>
+              <a:t>' </a:t>
+            </a:r>
+            <a:r>
+              <a:rPr lang="ko-KR" altLang="en-US" sz="1400" dirty="0">
+                <a:latin typeface="D2Coding" panose="020B0609020101020101" pitchFamily="49" charset="-127"/>
+                <a:ea typeface="D2Coding" panose="020B0609020101020101" pitchFamily="49" charset="-127"/>
+              </a:rPr>
+              <a:t>같은 사물의 구체적인 부속품</a:t>
+            </a:r>
+            <a:r>
+              <a:rPr lang="en-US" altLang="ko-KR" sz="1400" dirty="0">
+                <a:latin typeface="D2Coding" panose="020B0609020101020101" pitchFamily="49" charset="-127"/>
+                <a:ea typeface="D2Coding" panose="020B0609020101020101" pitchFamily="49" charset="-127"/>
+              </a:rPr>
+              <a:t>(Parts)</a:t>
+            </a:r>
+            <a:r>
+              <a:rPr lang="ko-KR" altLang="en-US" sz="1400" dirty="0">
+                <a:latin typeface="D2Coding" panose="020B0609020101020101" pitchFamily="49" charset="-127"/>
+                <a:ea typeface="D2Coding" panose="020B0609020101020101" pitchFamily="49" charset="-127"/>
+              </a:rPr>
+              <a:t>들을 찾아냄</a:t>
+            </a:r>
+            <a:r>
+              <a:rPr lang="en-US" altLang="ko-KR" sz="1400" dirty="0">
+                <a:latin typeface="D2Coding" panose="020B0609020101020101" pitchFamily="49" charset="-127"/>
+                <a:ea typeface="D2Coding" panose="020B0609020101020101" pitchFamily="49" charset="-127"/>
+              </a:rPr>
+              <a:t>(</a:t>
+            </a:r>
+            <a:r>
+              <a:rPr lang="en-US" altLang="ko-KR" sz="1400" dirty="0" err="1">
+                <a:latin typeface="D2Coding" panose="020B0609020101020101" pitchFamily="49" charset="-127"/>
+                <a:ea typeface="D2Coding" panose="020B0609020101020101" pitchFamily="49" charset="-127"/>
+              </a:rPr>
+              <a:t>Convet</a:t>
+            </a:r>
+            <a:r>
+              <a:rPr lang="en-US" altLang="ko-KR" sz="1400" dirty="0">
+                <a:latin typeface="D2Coding" panose="020B0609020101020101" pitchFamily="49" charset="-127"/>
+                <a:ea typeface="D2Coding" panose="020B0609020101020101" pitchFamily="49" charset="-127"/>
+              </a:rPr>
+              <a:t>_</a:t>
+            </a:r>
+            <a:r>
+              <a:rPr lang="ko-KR" altLang="en-US" sz="1400" dirty="0">
+                <a:latin typeface="D2Coding" panose="020B0609020101020101" pitchFamily="49" charset="-127"/>
+                <a:ea typeface="D2Coding" panose="020B0609020101020101" pitchFamily="49" charset="-127"/>
+              </a:rPr>
+              <a:t>심층 </a:t>
+            </a:r>
+            <a:r>
+              <a:rPr lang="en-US" altLang="ko-KR" sz="1400" dirty="0">
+                <a:latin typeface="D2Coding" panose="020B0609020101020101" pitchFamily="49" charset="-127"/>
+                <a:ea typeface="D2Coding" panose="020B0609020101020101" pitchFamily="49" charset="-127"/>
+              </a:rPr>
+              <a:t>Conv</a:t>
+            </a:r>
+            <a:r>
+              <a:rPr lang="ko-KR" altLang="en-US" sz="1400" dirty="0">
+                <a:latin typeface="D2Coding" panose="020B0609020101020101" pitchFamily="49" charset="-127"/>
+                <a:ea typeface="D2Coding" panose="020B0609020101020101" pitchFamily="49" charset="-127"/>
+              </a:rPr>
+              <a:t>층</a:t>
+            </a:r>
+            <a:r>
+              <a:rPr lang="en-US" altLang="ko-KR" sz="1400" dirty="0">
+                <a:latin typeface="D2Coding" panose="020B0609020101020101" pitchFamily="49" charset="-127"/>
+                <a:ea typeface="D2Coding" panose="020B0609020101020101" pitchFamily="49" charset="-127"/>
+              </a:rPr>
+              <a:t>: </a:t>
+            </a:r>
+            <a:r>
+              <a:rPr lang="ko-KR" altLang="en-US" sz="1400" dirty="0">
+                <a:latin typeface="D2Coding" panose="020B0609020101020101" pitchFamily="49" charset="-127"/>
+                <a:ea typeface="D2Coding" panose="020B0609020101020101" pitchFamily="49" charset="-127"/>
+              </a:rPr>
+              <a:t>넓은 영역을 보며 자동차 헤드라이트나 동물의 얼굴 형태 등 복잡하고 구체적인 객체의 특징을 활성화</a:t>
+            </a:r>
+            <a:r>
+              <a:rPr lang="en-US" altLang="ko-KR" sz="1400" dirty="0">
+                <a:latin typeface="D2Coding" panose="020B0609020101020101" pitchFamily="49" charset="-127"/>
+                <a:ea typeface="D2Coding" panose="020B0609020101020101" pitchFamily="49" charset="-127"/>
+              </a:rPr>
+              <a:t>)</a:t>
+            </a:r>
+          </a:p>
+          <a:p>
+            <a:pPr marL="285750" lvl="0" indent="-285750" fontAlgn="base">
+              <a:lnSpc>
+                <a:spcPct val="150000"/>
+              </a:lnSpc>
+              <a:spcBef>
+                <a:spcPct val="0"/>
+              </a:spcBef>
+              <a:spcAft>
+                <a:spcPct val="0"/>
+              </a:spcAft>
+              <a:buFont typeface="Wingdings" panose="05000000000000000000" pitchFamily="2" charset="2"/>
+              <a:buChar char="v"/>
+            </a:pPr>
+            <a:endParaRPr lang="en-US" altLang="ko-KR" sz="600" dirty="0">
+              <a:latin typeface="D2Coding" panose="020B0609020101020101" pitchFamily="49" charset="-127"/>
+              <a:ea typeface="D2Coding" panose="020B0609020101020101" pitchFamily="49" charset="-127"/>
+            </a:endParaRPr>
+          </a:p>
+          <a:p>
+            <a:pPr marL="285750" lvl="0" indent="-285750" fontAlgn="base">
+              <a:lnSpc>
+                <a:spcPct val="150000"/>
+              </a:lnSpc>
+              <a:spcBef>
+                <a:spcPct val="0"/>
+              </a:spcBef>
+              <a:spcAft>
+                <a:spcPct val="0"/>
+              </a:spcAft>
+              <a:buFont typeface="Wingdings" panose="05000000000000000000" pitchFamily="2" charset="2"/>
+              <a:buChar char="v"/>
+            </a:pPr>
+            <a:r>
+              <a:rPr lang="en-US" altLang="ko-KR" sz="1400" dirty="0">
+                <a:latin typeface="D2Coding" panose="020B0609020101020101" pitchFamily="49" charset="-127"/>
+                <a:ea typeface="D2Coding" panose="020B0609020101020101" pitchFamily="49" charset="-127"/>
+              </a:rPr>
+              <a:t>4</a:t>
+            </a:r>
+            <a:r>
+              <a:rPr lang="ko-KR" altLang="en-US" sz="1400" dirty="0">
+                <a:latin typeface="D2Coding" panose="020B0609020101020101" pitchFamily="49" charset="-127"/>
+                <a:ea typeface="D2Coding" panose="020B0609020101020101" pitchFamily="49" charset="-127"/>
+              </a:rPr>
+              <a:t>단계 </a:t>
+            </a:r>
+            <a:r>
+              <a:rPr lang="en-US" altLang="ko-KR" sz="1400" dirty="0">
+                <a:latin typeface="D2Coding" panose="020B0609020101020101" pitchFamily="49" charset="-127"/>
+                <a:ea typeface="D2Coding" panose="020B0609020101020101" pitchFamily="49" charset="-127"/>
+              </a:rPr>
+              <a:t>: </a:t>
+            </a:r>
+            <a:r>
+              <a:rPr lang="ko-KR" altLang="en-US" sz="1400" dirty="0">
+                <a:latin typeface="D2Coding" panose="020B0609020101020101" pitchFamily="49" charset="-127"/>
+                <a:ea typeface="D2Coding" panose="020B0609020101020101" pitchFamily="49" charset="-127"/>
+              </a:rPr>
+              <a:t>최종 분류 및 이름표 붙이기 </a:t>
+            </a:r>
+            <a:r>
+              <a:rPr lang="en-US" altLang="ko-KR" sz="1400" dirty="0">
+                <a:latin typeface="D2Coding" panose="020B0609020101020101" pitchFamily="49" charset="-127"/>
+                <a:ea typeface="D2Coding" panose="020B0609020101020101" pitchFamily="49" charset="-127"/>
+              </a:rPr>
+              <a:t>(</a:t>
+            </a:r>
+            <a:r>
+              <a:rPr lang="ko-KR" altLang="en-US" sz="1400" dirty="0">
+                <a:latin typeface="D2Coding" panose="020B0609020101020101" pitchFamily="49" charset="-127"/>
+                <a:ea typeface="D2Coding" panose="020B0609020101020101" pitchFamily="49" charset="-127"/>
+              </a:rPr>
+              <a:t>출력 레이어</a:t>
+            </a:r>
+            <a:r>
+              <a:rPr lang="en-US" altLang="ko-KR" sz="1400" dirty="0">
+                <a:latin typeface="D2Coding" panose="020B0609020101020101" pitchFamily="49" charset="-127"/>
+                <a:ea typeface="D2Coding" panose="020B0609020101020101" pitchFamily="49" charset="-127"/>
+              </a:rPr>
+              <a:t>)</a:t>
+            </a:r>
+            <a:r>
+              <a:rPr lang="ko-KR" altLang="en-US" sz="1400" dirty="0">
+                <a:latin typeface="D2Coding" panose="020B0609020101020101" pitchFamily="49" charset="-127"/>
+                <a:ea typeface="D2Coding" panose="020B0609020101020101" pitchFamily="49" charset="-127"/>
+              </a:rPr>
+              <a:t>뇌 </a:t>
+            </a:r>
+            <a:r>
+              <a:rPr lang="en-US" altLang="ko-KR" sz="1400" dirty="0">
+                <a:latin typeface="D2Coding" panose="020B0609020101020101" pitchFamily="49" charset="-127"/>
+                <a:ea typeface="D2Coding" panose="020B0609020101020101" pitchFamily="49" charset="-127"/>
+              </a:rPr>
+              <a:t>(IT </a:t>
+            </a:r>
+            <a:r>
+              <a:rPr lang="ko-KR" altLang="en-US" sz="1400" dirty="0">
+                <a:latin typeface="D2Coding" panose="020B0609020101020101" pitchFamily="49" charset="-127"/>
+                <a:ea typeface="D2Coding" panose="020B0609020101020101" pitchFamily="49" charset="-127"/>
+              </a:rPr>
+              <a:t>피질 전방 </a:t>
+            </a:r>
+            <a:r>
+              <a:rPr lang="en-US" altLang="ko-KR" sz="1400" dirty="0">
+                <a:latin typeface="D2Coding" panose="020B0609020101020101" pitchFamily="49" charset="-127"/>
+                <a:ea typeface="D2Coding" panose="020B0609020101020101" pitchFamily="49" charset="-127"/>
+              </a:rPr>
+              <a:t>~ </a:t>
+            </a:r>
+            <a:r>
+              <a:rPr lang="ko-KR" altLang="en-US" sz="1400" dirty="0">
+                <a:latin typeface="D2Coding" panose="020B0609020101020101" pitchFamily="49" charset="-127"/>
+                <a:ea typeface="D2Coding" panose="020B0609020101020101" pitchFamily="49" charset="-127"/>
+              </a:rPr>
+              <a:t>전두엽</a:t>
+            </a:r>
+            <a:r>
+              <a:rPr lang="en-US" altLang="ko-KR" sz="1400" dirty="0">
+                <a:latin typeface="D2Coding" panose="020B0609020101020101" pitchFamily="49" charset="-127"/>
+                <a:ea typeface="D2Coding" panose="020B0609020101020101" pitchFamily="49" charset="-127"/>
+              </a:rPr>
+              <a:t>): </a:t>
+            </a:r>
+            <a:r>
+              <a:rPr lang="ko-KR" altLang="en-US" sz="1400" dirty="0">
+                <a:latin typeface="D2Coding" panose="020B0609020101020101" pitchFamily="49" charset="-127"/>
+                <a:ea typeface="D2Coding" panose="020B0609020101020101" pitchFamily="49" charset="-127"/>
+              </a:rPr>
+              <a:t>부분 정보들을 종합해 뇌 속 개념과 연결한 뒤</a:t>
+            </a:r>
+            <a:r>
+              <a:rPr lang="en-US" altLang="ko-KR" sz="1400" dirty="0">
+                <a:latin typeface="D2Coding" panose="020B0609020101020101" pitchFamily="49" charset="-127"/>
+                <a:ea typeface="D2Coding" panose="020B0609020101020101" pitchFamily="49" charset="-127"/>
+              </a:rPr>
+              <a:t>, "</a:t>
+            </a:r>
+            <a:r>
+              <a:rPr lang="ko-KR" altLang="en-US" sz="1400" dirty="0">
+                <a:latin typeface="D2Coding" panose="020B0609020101020101" pitchFamily="49" charset="-127"/>
+                <a:ea typeface="D2Coding" panose="020B0609020101020101" pitchFamily="49" charset="-127"/>
+              </a:rPr>
+              <a:t>이것은 고양이다</a:t>
+            </a:r>
+            <a:r>
+              <a:rPr lang="en-US" altLang="ko-KR" sz="1400" dirty="0">
+                <a:latin typeface="D2Coding" panose="020B0609020101020101" pitchFamily="49" charset="-127"/>
+                <a:ea typeface="D2Coding" panose="020B0609020101020101" pitchFamily="49" charset="-127"/>
+              </a:rPr>
+              <a:t>", "</a:t>
+            </a:r>
+            <a:r>
+              <a:rPr lang="ko-KR" altLang="en-US" sz="1400" dirty="0">
+                <a:latin typeface="D2Coding" panose="020B0609020101020101" pitchFamily="49" charset="-127"/>
+                <a:ea typeface="D2Coding" panose="020B0609020101020101" pitchFamily="49" charset="-127"/>
+              </a:rPr>
+              <a:t>자동차다</a:t>
+            </a:r>
+            <a:r>
+              <a:rPr lang="en-US" altLang="ko-KR" sz="1400" dirty="0">
+                <a:latin typeface="D2Coding" panose="020B0609020101020101" pitchFamily="49" charset="-127"/>
+                <a:ea typeface="D2Coding" panose="020B0609020101020101" pitchFamily="49" charset="-127"/>
+              </a:rPr>
+              <a:t>"</a:t>
+            </a:r>
+            <a:r>
+              <a:rPr lang="ko-KR" altLang="en-US" sz="1400" dirty="0">
+                <a:latin typeface="D2Coding" panose="020B0609020101020101" pitchFamily="49" charset="-127"/>
+                <a:ea typeface="D2Coding" panose="020B0609020101020101" pitchFamily="49" charset="-127"/>
+              </a:rPr>
+              <a:t>라고 최종 인지</a:t>
+            </a:r>
+            <a:r>
+              <a:rPr lang="en-US" altLang="ko-KR" sz="1400" dirty="0">
+                <a:latin typeface="D2Coding" panose="020B0609020101020101" pitchFamily="49" charset="-127"/>
+                <a:ea typeface="D2Coding" panose="020B0609020101020101" pitchFamily="49" charset="-127"/>
+              </a:rPr>
+              <a:t>(</a:t>
+            </a:r>
+            <a:r>
+              <a:rPr lang="en-US" altLang="ko-KR" sz="1400" dirty="0" err="1">
+                <a:latin typeface="D2Coding" panose="020B0609020101020101" pitchFamily="49" charset="-127"/>
+                <a:ea typeface="D2Coding" panose="020B0609020101020101" pitchFamily="49" charset="-127"/>
+              </a:rPr>
+              <a:t>Convet_FC</a:t>
+            </a:r>
+            <a:r>
+              <a:rPr lang="ko-KR" altLang="en-US" sz="1400" dirty="0">
+                <a:latin typeface="D2Coding" panose="020B0609020101020101" pitchFamily="49" charset="-127"/>
+                <a:ea typeface="D2Coding" panose="020B0609020101020101" pitchFamily="49" charset="-127"/>
+              </a:rPr>
+              <a:t>층 </a:t>
+            </a:r>
+            <a:r>
+              <a:rPr lang="en-US" altLang="ko-KR" sz="1400" dirty="0">
+                <a:latin typeface="D2Coding" panose="020B0609020101020101" pitchFamily="49" charset="-127"/>
+                <a:ea typeface="D2Coding" panose="020B0609020101020101" pitchFamily="49" charset="-127"/>
+              </a:rPr>
+              <a:t>~ </a:t>
+            </a:r>
+            <a:r>
+              <a:rPr lang="en-US" altLang="ko-KR" sz="1400" dirty="0" err="1">
+                <a:latin typeface="D2Coding" panose="020B0609020101020101" pitchFamily="49" charset="-127"/>
+                <a:ea typeface="D2Coding" panose="020B0609020101020101" pitchFamily="49" charset="-127"/>
+              </a:rPr>
+              <a:t>Softmax</a:t>
+            </a:r>
+            <a:r>
+              <a:rPr lang="en-US" altLang="ko-KR" sz="1400" dirty="0">
+                <a:latin typeface="D2Coding" panose="020B0609020101020101" pitchFamily="49" charset="-127"/>
+                <a:ea typeface="D2Coding" panose="020B0609020101020101" pitchFamily="49" charset="-127"/>
+              </a:rPr>
+              <a:t>: </a:t>
+            </a:r>
+            <a:r>
+              <a:rPr lang="ko-KR" altLang="en-US" sz="1400" dirty="0">
+                <a:latin typeface="D2Coding" panose="020B0609020101020101" pitchFamily="49" charset="-127"/>
+                <a:ea typeface="D2Coding" panose="020B0609020101020101" pitchFamily="49" charset="-127"/>
+              </a:rPr>
+              <a:t>추출된 고차원 특징들을 하나로 모아 계산한 뒤</a:t>
+            </a:r>
+            <a:r>
+              <a:rPr lang="en-US" altLang="ko-KR" sz="1400" dirty="0">
+                <a:latin typeface="D2Coding" panose="020B0609020101020101" pitchFamily="49" charset="-127"/>
+                <a:ea typeface="D2Coding" panose="020B0609020101020101" pitchFamily="49" charset="-127"/>
+              </a:rPr>
+              <a:t>, </a:t>
+            </a:r>
+            <a:r>
+              <a:rPr lang="ko-KR" altLang="en-US" sz="1400" dirty="0">
+                <a:latin typeface="D2Coding" panose="020B0609020101020101" pitchFamily="49" charset="-127"/>
+                <a:ea typeface="D2Coding" panose="020B0609020101020101" pitchFamily="49" charset="-127"/>
+              </a:rPr>
+              <a:t>각 클래스별 확률</a:t>
+            </a:r>
+            <a:r>
+              <a:rPr lang="en-US" altLang="ko-KR" sz="1400" dirty="0">
+                <a:latin typeface="D2Coding" panose="020B0609020101020101" pitchFamily="49" charset="-127"/>
+                <a:ea typeface="D2Coding" panose="020B0609020101020101" pitchFamily="49" charset="-127"/>
+              </a:rPr>
+              <a:t>(</a:t>
+            </a:r>
+            <a:r>
+              <a:rPr lang="ko-KR" altLang="en-US" sz="1400" dirty="0">
+                <a:latin typeface="D2Coding" panose="020B0609020101020101" pitchFamily="49" charset="-127"/>
+                <a:ea typeface="D2Coding" panose="020B0609020101020101" pitchFamily="49" charset="-127"/>
+              </a:rPr>
+              <a:t>예</a:t>
+            </a:r>
+            <a:r>
+              <a:rPr lang="en-US" altLang="ko-KR" sz="1400" dirty="0">
+                <a:latin typeface="D2Coding" panose="020B0609020101020101" pitchFamily="49" charset="-127"/>
+                <a:ea typeface="D2Coding" panose="020B0609020101020101" pitchFamily="49" charset="-127"/>
+              </a:rPr>
+              <a:t>: </a:t>
+            </a:r>
+            <a:r>
+              <a:rPr lang="ko-KR" altLang="en-US" sz="1400" dirty="0">
+                <a:latin typeface="D2Coding" panose="020B0609020101020101" pitchFamily="49" charset="-127"/>
+                <a:ea typeface="D2Coding" panose="020B0609020101020101" pitchFamily="49" charset="-127"/>
+              </a:rPr>
+              <a:t>고양이 </a:t>
+            </a:r>
+            <a:r>
+              <a:rPr lang="en-US" altLang="ko-KR" sz="1400" dirty="0">
+                <a:latin typeface="D2Coding" panose="020B0609020101020101" pitchFamily="49" charset="-127"/>
+                <a:ea typeface="D2Coding" panose="020B0609020101020101" pitchFamily="49" charset="-127"/>
+              </a:rPr>
+              <a:t>95%)</a:t>
+            </a:r>
+            <a:r>
+              <a:rPr lang="ko-KR" altLang="en-US" sz="1400" dirty="0">
+                <a:latin typeface="D2Coding" panose="020B0609020101020101" pitchFamily="49" charset="-127"/>
+                <a:ea typeface="D2Coding" panose="020B0609020101020101" pitchFamily="49" charset="-127"/>
+              </a:rPr>
+              <a:t>을 내며 분류를 완료</a:t>
+            </a:r>
+            <a:r>
+              <a:rPr lang="en-US" altLang="ko-KR" sz="1400" dirty="0">
+                <a:latin typeface="D2Coding" panose="020B0609020101020101" pitchFamily="49" charset="-127"/>
+                <a:ea typeface="D2Coding" panose="020B0609020101020101" pitchFamily="49" charset="-127"/>
+              </a:rPr>
+              <a:t>)</a:t>
+            </a:r>
+          </a:p>
+        </p:txBody>
+      </p:sp>
+    </p:spTree>
+    <p:extLst>
+      <p:ext uri="{BB962C8B-B14F-4D97-AF65-F5344CB8AC3E}">
+        <p14:creationId xmlns:p14="http://schemas.microsoft.com/office/powerpoint/2010/main" val="3625287505"/>
+      </p:ext>
+    </p:extLst>
+  </p:cSld>
+  <p:clrMapOvr>
+    <a:masterClrMapping/>
+  </p:clrMapOvr>
+</p:sld>
+</file>
+
+<file path=ppt/slides/slide5.xml><?xml version="1.0" encoding="utf-8"?>
+<p:sld xmlns:a="http://schemas.openxmlformats.org/drawingml/2006/main" xmlns:r="http://schemas.openxmlformats.org/officeDocument/2006/relationships" xmlns:p="http://schemas.openxmlformats.org/presentationml/2006/main">
+  <p:cSld>
+    <p:spTree>
+      <p:nvGrpSpPr>
+        <p:cNvPr id="1" name="">
+          <a:extLst>
+            <a:ext uri="{FF2B5EF4-FFF2-40B4-BE49-F238E27FC236}">
               <a16:creationId xmlns:a16="http://schemas.microsoft.com/office/drawing/2014/main" id="{E03667BA-883A-F760-A852-48089498115B}"/>
             </a:ext>
           </a:extLst>
@@ -3339,7 +5171,7 @@
             <a:fld id="{D57F1E4F-1CFF-5643-939E-217C01CDF565}" type="slidenum">
               <a:rPr lang="en-US" smtClean="0"/>
               <a:pPr/>
-              <a:t>3</a:t>
+              <a:t>5</a:t>
             </a:fld>
             <a:endParaRPr lang="en-US" dirty="0"/>
           </a:p>
@@ -3904,7 +5736,7 @@
 </p:sld>
 </file>
 
-<file path=ppt/slides/slide4.xml><?xml version="1.0" encoding="utf-8"?>
+<file path=ppt/slides/slide6.xml><?xml version="1.0" encoding="utf-8"?>
 <p:sld xmlns:a="http://schemas.openxmlformats.org/drawingml/2006/main" xmlns:r="http://schemas.openxmlformats.org/officeDocument/2006/relationships" xmlns:p="http://schemas.openxmlformats.org/presentationml/2006/main">
   <p:cSld>
     <p:spTree>
@@ -3956,7 +5788,7 @@
             <a:fld id="{D57F1E4F-1CFF-5643-939E-217C01CDF565}" type="slidenum">
               <a:rPr lang="en-US" smtClean="0"/>
               <a:pPr/>
-              <a:t>4</a:t>
+              <a:t>6</a:t>
             </a:fld>
             <a:endParaRPr lang="en-US" dirty="0"/>
           </a:p>
@@ -4293,7 +6125,7 @@
 </p:sld>
 </file>
 
-<file path=ppt/slides/slide5.xml><?xml version="1.0" encoding="utf-8"?>
+<file path=ppt/slides/slide7.xml><?xml version="1.0" encoding="utf-8"?>
 <p:sld xmlns:a="http://schemas.openxmlformats.org/drawingml/2006/main" xmlns:r="http://schemas.openxmlformats.org/officeDocument/2006/relationships" xmlns:p="http://schemas.openxmlformats.org/presentationml/2006/main">
   <p:cSld>
     <p:spTree>
@@ -4345,7 +6177,7 @@
             <a:fld id="{D57F1E4F-1CFF-5643-939E-217C01CDF565}" type="slidenum">
               <a:rPr lang="en-US" smtClean="0"/>
               <a:pPr/>
-              <a:t>5</a:t>
+              <a:t>7</a:t>
             </a:fld>
             <a:endParaRPr lang="en-US" dirty="0"/>
           </a:p>
@@ -4921,7 +6753,7 @@
 </p:sld>
 </file>
 
-<file path=ppt/slides/slide6.xml><?xml version="1.0" encoding="utf-8"?>
+<file path=ppt/slides/slide8.xml><?xml version="1.0" encoding="utf-8"?>
 <p:sld xmlns:a="http://schemas.openxmlformats.org/drawingml/2006/main" xmlns:r="http://schemas.openxmlformats.org/officeDocument/2006/relationships" xmlns:p="http://schemas.openxmlformats.org/presentationml/2006/main">
   <p:cSld>
     <p:spTree>
@@ -4973,7 +6805,7 @@
             <a:fld id="{D57F1E4F-1CFF-5643-939E-217C01CDF565}" type="slidenum">
               <a:rPr lang="en-US" smtClean="0"/>
               <a:pPr/>
-              <a:t>6</a:t>
+              <a:t>8</a:t>
             </a:fld>
             <a:endParaRPr lang="en-US" dirty="0"/>
           </a:p>
@@ -5569,813 +7401,6 @@
     <p:extLst>
       <p:ext uri="{BB962C8B-B14F-4D97-AF65-F5344CB8AC3E}">
         <p14:creationId xmlns:p14="http://schemas.microsoft.com/office/powerpoint/2010/main" val="3657211076"/>
-      </p:ext>
-    </p:extLst>
-  </p:cSld>
-  <p:clrMapOvr>
-    <a:masterClrMapping/>
-  </p:clrMapOvr>
-</p:sld>
-</file>
-
-<file path=ppt/slides/slide7.xml><?xml version="1.0" encoding="utf-8"?>
-<p:sld xmlns:a="http://schemas.openxmlformats.org/drawingml/2006/main" xmlns:r="http://schemas.openxmlformats.org/officeDocument/2006/relationships" xmlns:p="http://schemas.openxmlformats.org/presentationml/2006/main">
-  <p:cSld>
-    <p:spTree>
-      <p:nvGrpSpPr>
-        <p:cNvPr id="1" name="">
-          <a:extLst>
-            <a:ext uri="{FF2B5EF4-FFF2-40B4-BE49-F238E27FC236}">
-              <a16:creationId xmlns:a16="http://schemas.microsoft.com/office/drawing/2014/main" id="{C569DADC-8799-0961-0B0D-A29CBDC81332}"/>
-            </a:ext>
-          </a:extLst>
-        </p:cNvPr>
-        <p:cNvGrpSpPr/>
-        <p:nvPr/>
-      </p:nvGrpSpPr>
-      <p:grpSpPr>
-        <a:xfrm>
-          <a:off x="0" y="0"/>
-          <a:ext cx="0" cy="0"/>
-          <a:chOff x="0" y="0"/>
-          <a:chExt cx="0" cy="0"/>
-        </a:xfrm>
-      </p:grpSpPr>
-      <p:sp>
-        <p:nvSpPr>
-          <p:cNvPr id="4" name="슬라이드 번호 개체 틀 3">
-            <a:extLst>
-              <a:ext uri="{FF2B5EF4-FFF2-40B4-BE49-F238E27FC236}">
-                <a16:creationId xmlns:a16="http://schemas.microsoft.com/office/drawing/2014/main" id="{6FC4F353-D9DB-0EBA-9F28-196E6EC6F94E}"/>
-              </a:ext>
-            </a:extLst>
-          </p:cNvPr>
-          <p:cNvSpPr>
-            <a:spLocks noGrp="1"/>
-          </p:cNvSpPr>
-          <p:nvPr>
-            <p:ph type="sldNum" sz="quarter" idx="12"/>
-          </p:nvPr>
-        </p:nvSpPr>
-        <p:spPr>
-          <a:xfrm>
-            <a:off x="10514011" y="6036261"/>
-            <a:ext cx="753545" cy="365125"/>
-          </a:xfrm>
-        </p:spPr>
-        <p:txBody>
-          <a:bodyPr/>
-          <a:lstStyle/>
-          <a:p>
-            <a:fld id="{D57F1E4F-1CFF-5643-939E-217C01CDF565}" type="slidenum">
-              <a:rPr lang="en-US" smtClean="0"/>
-              <a:pPr/>
-              <a:t>7</a:t>
-            </a:fld>
-            <a:endParaRPr lang="en-US" dirty="0"/>
-          </a:p>
-        </p:txBody>
-      </p:sp>
-      <p:sp>
-        <p:nvSpPr>
-          <p:cNvPr id="3" name="제목 1">
-            <a:extLst>
-              <a:ext uri="{FF2B5EF4-FFF2-40B4-BE49-F238E27FC236}">
-                <a16:creationId xmlns:a16="http://schemas.microsoft.com/office/drawing/2014/main" id="{4A41C013-C2E7-3274-2AA4-21EC56CF356C}"/>
-              </a:ext>
-            </a:extLst>
-          </p:cNvPr>
-          <p:cNvSpPr txBox="1">
-            <a:spLocks/>
-          </p:cNvSpPr>
-          <p:nvPr/>
-        </p:nvSpPr>
-        <p:spPr>
-          <a:xfrm>
-            <a:off x="475645" y="481983"/>
-            <a:ext cx="10353762" cy="766439"/>
-          </a:xfrm>
-          <a:prstGeom prst="rect">
-            <a:avLst/>
-          </a:prstGeom>
-        </p:spPr>
-        <p:txBody>
-          <a:bodyPr vert="horz" lIns="91440" tIns="45720" rIns="91440" bIns="45720" rtlCol="0" anchor="ctr">
-            <a:normAutofit/>
-          </a:bodyPr>
-          <a:lstStyle>
-            <a:lvl1pPr algn="ctr" defTabSz="914400" rtl="0" eaLnBrk="1" latinLnBrk="1" hangingPunct="1">
-              <a:lnSpc>
-                <a:spcPct val="90000"/>
-              </a:lnSpc>
-              <a:spcBef>
-                <a:spcPct val="0"/>
-              </a:spcBef>
-              <a:buNone/>
-              <a:defRPr sz="3200" kern="1200" cap="all" baseline="0">
-                <a:solidFill>
-                  <a:schemeClr val="tx1"/>
-                </a:solidFill>
-                <a:effectLst/>
-                <a:latin typeface="Batang" panose="02030600000101010101" pitchFamily="18" charset="-127"/>
-                <a:ea typeface="Batang" panose="02030600000101010101" pitchFamily="18" charset="-127"/>
-                <a:cs typeface="+mj-cs"/>
-              </a:defRPr>
-            </a:lvl1pPr>
-          </a:lstStyle>
-          <a:p>
-            <a:pPr algn="l"/>
-            <a:r>
-              <a:rPr lang="en-US" altLang="ko-KR" sz="2800" cap="none" dirty="0">
-                <a:solidFill>
-                  <a:schemeClr val="bg2">
-                    <a:lumMod val="25000"/>
-                  </a:schemeClr>
-                </a:solidFill>
-                <a:latin typeface="D2Coding" panose="020B0609020101020101" pitchFamily="49" charset="-127"/>
-                <a:ea typeface="D2Coding" panose="020B0609020101020101" pitchFamily="49" charset="-127"/>
-                <a:cs typeface="Segoe UI Light" panose="020B0502040204020203" pitchFamily="34" charset="0"/>
-              </a:rPr>
-              <a:t>Visualizing intermediate activations</a:t>
-            </a:r>
-          </a:p>
-        </p:txBody>
-      </p:sp>
-      <p:sp>
-        <p:nvSpPr>
-          <p:cNvPr id="5" name="TextBox 4">
-            <a:extLst>
-              <a:ext uri="{FF2B5EF4-FFF2-40B4-BE49-F238E27FC236}">
-                <a16:creationId xmlns:a16="http://schemas.microsoft.com/office/drawing/2014/main" id="{7998F07E-C402-FFC6-E5F0-D0D6A14E7E1D}"/>
-              </a:ext>
-            </a:extLst>
-          </p:cNvPr>
-          <p:cNvSpPr txBox="1"/>
-          <p:nvPr/>
-        </p:nvSpPr>
-        <p:spPr>
-          <a:xfrm>
-            <a:off x="682484" y="1303722"/>
-            <a:ext cx="10890392" cy="465320"/>
-          </a:xfrm>
-          <a:prstGeom prst="rect">
-            <a:avLst/>
-          </a:prstGeom>
-          <a:noFill/>
-        </p:spPr>
-        <p:txBody>
-          <a:bodyPr wrap="square" rtlCol="0">
-            <a:spAutoFit/>
-          </a:bodyPr>
-          <a:lstStyle/>
-          <a:p>
-            <a:pPr lvl="0" fontAlgn="base">
-              <a:lnSpc>
-                <a:spcPct val="150000"/>
-              </a:lnSpc>
-              <a:spcBef>
-                <a:spcPct val="0"/>
-              </a:spcBef>
-              <a:spcAft>
-                <a:spcPct val="0"/>
-              </a:spcAft>
-            </a:pPr>
-            <a:r>
-              <a:rPr lang="ko-KR" altLang="en-US" dirty="0" err="1">
-                <a:latin typeface="D2Coding" panose="020B0609020101020101" pitchFamily="49" charset="-127"/>
-                <a:ea typeface="D2Coding" panose="020B0609020101020101" pitchFamily="49" charset="-127"/>
-              </a:rPr>
-              <a:t>합성곱</a:t>
-            </a:r>
-            <a:r>
-              <a:rPr lang="ko-KR" altLang="en-US" dirty="0">
-                <a:latin typeface="D2Coding" panose="020B0609020101020101" pitchFamily="49" charset="-127"/>
-                <a:ea typeface="D2Coding" panose="020B0609020101020101" pitchFamily="49" charset="-127"/>
-              </a:rPr>
-              <a:t> 신경망</a:t>
-            </a:r>
-            <a:r>
-              <a:rPr lang="en-US" altLang="ko-KR" dirty="0">
-                <a:latin typeface="D2Coding" panose="020B0609020101020101" pitchFamily="49" charset="-127"/>
-                <a:ea typeface="D2Coding" panose="020B0609020101020101" pitchFamily="49" charset="-127"/>
-              </a:rPr>
-              <a:t>(</a:t>
-            </a:r>
-            <a:r>
-              <a:rPr lang="en-US" altLang="ko-KR" dirty="0" err="1">
-                <a:latin typeface="D2Coding" panose="020B0609020101020101" pitchFamily="49" charset="-127"/>
-                <a:ea typeface="D2Coding" panose="020B0609020101020101" pitchFamily="49" charset="-127"/>
-              </a:rPr>
-              <a:t>ConvNet</a:t>
-            </a:r>
-            <a:r>
-              <a:rPr lang="en-US" altLang="ko-KR" dirty="0">
-                <a:latin typeface="D2Coding" panose="020B0609020101020101" pitchFamily="49" charset="-127"/>
-                <a:ea typeface="D2Coding" panose="020B0609020101020101" pitchFamily="49" charset="-127"/>
-              </a:rPr>
-              <a:t>)</a:t>
-            </a:r>
-            <a:r>
-              <a:rPr lang="ko-KR" altLang="en-US" dirty="0">
-                <a:latin typeface="D2Coding" panose="020B0609020101020101" pitchFamily="49" charset="-127"/>
-                <a:ea typeface="D2Coding" panose="020B0609020101020101" pitchFamily="49" charset="-127"/>
-              </a:rPr>
-              <a:t>의 </a:t>
-            </a:r>
-            <a:r>
-              <a:rPr lang="en-US" altLang="ko-KR" dirty="0">
-                <a:latin typeface="D2Coding" panose="020B0609020101020101" pitchFamily="49" charset="-127"/>
-                <a:ea typeface="D2Coding" panose="020B0609020101020101" pitchFamily="49" charset="-127"/>
-              </a:rPr>
-              <a:t>‘</a:t>
-            </a:r>
-            <a:r>
-              <a:rPr lang="ko-KR" altLang="en-US" dirty="0">
-                <a:latin typeface="D2Coding" panose="020B0609020101020101" pitchFamily="49" charset="-127"/>
-                <a:ea typeface="D2Coding" panose="020B0609020101020101" pitchFamily="49" charset="-127"/>
-              </a:rPr>
-              <a:t>시각화 및 시각적 설명 가능성</a:t>
-            </a:r>
-            <a:r>
-              <a:rPr lang="en-US" altLang="ko-KR" dirty="0">
-                <a:latin typeface="D2Coding" panose="020B0609020101020101" pitchFamily="49" charset="-127"/>
-                <a:ea typeface="D2Coding" panose="020B0609020101020101" pitchFamily="49" charset="-127"/>
-              </a:rPr>
-              <a:t>(Interpretability)’</a:t>
-            </a:r>
-          </a:p>
-        </p:txBody>
-      </p:sp>
-    </p:spTree>
-    <p:extLst>
-      <p:ext uri="{BB962C8B-B14F-4D97-AF65-F5344CB8AC3E}">
-        <p14:creationId xmlns:p14="http://schemas.microsoft.com/office/powerpoint/2010/main" val="544542349"/>
-      </p:ext>
-    </p:extLst>
-  </p:cSld>
-  <p:clrMapOvr>
-    <a:masterClrMapping/>
-  </p:clrMapOvr>
-</p:sld>
-</file>
-
-<file path=ppt/slides/slide8.xml><?xml version="1.0" encoding="utf-8"?>
-<p:sld xmlns:a="http://schemas.openxmlformats.org/drawingml/2006/main" xmlns:r="http://schemas.openxmlformats.org/officeDocument/2006/relationships" xmlns:p="http://schemas.openxmlformats.org/presentationml/2006/main">
-  <p:cSld>
-    <p:spTree>
-      <p:nvGrpSpPr>
-        <p:cNvPr id="1" name="">
-          <a:extLst>
-            <a:ext uri="{FF2B5EF4-FFF2-40B4-BE49-F238E27FC236}">
-              <a16:creationId xmlns:a16="http://schemas.microsoft.com/office/drawing/2014/main" id="{618059F0-DFCF-B6C9-2E40-219D45F2EA36}"/>
-            </a:ext>
-          </a:extLst>
-        </p:cNvPr>
-        <p:cNvGrpSpPr/>
-        <p:nvPr/>
-      </p:nvGrpSpPr>
-      <p:grpSpPr>
-        <a:xfrm>
-          <a:off x="0" y="0"/>
-          <a:ext cx="0" cy="0"/>
-          <a:chOff x="0" y="0"/>
-          <a:chExt cx="0" cy="0"/>
-        </a:xfrm>
-      </p:grpSpPr>
-      <p:sp>
-        <p:nvSpPr>
-          <p:cNvPr id="4" name="슬라이드 번호 개체 틀 3">
-            <a:extLst>
-              <a:ext uri="{FF2B5EF4-FFF2-40B4-BE49-F238E27FC236}">
-                <a16:creationId xmlns:a16="http://schemas.microsoft.com/office/drawing/2014/main" id="{C054B979-520C-CADB-3B22-B86C5921AE84}"/>
-              </a:ext>
-            </a:extLst>
-          </p:cNvPr>
-          <p:cNvSpPr>
-            <a:spLocks noGrp="1"/>
-          </p:cNvSpPr>
-          <p:nvPr>
-            <p:ph type="sldNum" sz="quarter" idx="12"/>
-          </p:nvPr>
-        </p:nvSpPr>
-        <p:spPr>
-          <a:xfrm>
-            <a:off x="10514011" y="6036261"/>
-            <a:ext cx="753545" cy="365125"/>
-          </a:xfrm>
-        </p:spPr>
-        <p:txBody>
-          <a:bodyPr/>
-          <a:lstStyle/>
-          <a:p>
-            <a:fld id="{D57F1E4F-1CFF-5643-939E-217C01CDF565}" type="slidenum">
-              <a:rPr lang="en-US" smtClean="0"/>
-              <a:pPr/>
-              <a:t>8</a:t>
-            </a:fld>
-            <a:endParaRPr lang="en-US" dirty="0"/>
-          </a:p>
-        </p:txBody>
-      </p:sp>
-      <p:sp>
-        <p:nvSpPr>
-          <p:cNvPr id="3" name="제목 1">
-            <a:extLst>
-              <a:ext uri="{FF2B5EF4-FFF2-40B4-BE49-F238E27FC236}">
-                <a16:creationId xmlns:a16="http://schemas.microsoft.com/office/drawing/2014/main" id="{D3FBA54F-971F-B4E5-9F05-D24C24B78570}"/>
-              </a:ext>
-            </a:extLst>
-          </p:cNvPr>
-          <p:cNvSpPr txBox="1">
-            <a:spLocks/>
-          </p:cNvSpPr>
-          <p:nvPr/>
-        </p:nvSpPr>
-        <p:spPr>
-          <a:xfrm>
-            <a:off x="475645" y="481983"/>
-            <a:ext cx="10353762" cy="766439"/>
-          </a:xfrm>
-          <a:prstGeom prst="rect">
-            <a:avLst/>
-          </a:prstGeom>
-        </p:spPr>
-        <p:txBody>
-          <a:bodyPr vert="horz" lIns="91440" tIns="45720" rIns="91440" bIns="45720" rtlCol="0" anchor="ctr">
-            <a:normAutofit/>
-          </a:bodyPr>
-          <a:lstStyle>
-            <a:lvl1pPr algn="ctr" defTabSz="914400" rtl="0" eaLnBrk="1" latinLnBrk="1" hangingPunct="1">
-              <a:lnSpc>
-                <a:spcPct val="90000"/>
-              </a:lnSpc>
-              <a:spcBef>
-                <a:spcPct val="0"/>
-              </a:spcBef>
-              <a:buNone/>
-              <a:defRPr sz="3200" kern="1200" cap="all" baseline="0">
-                <a:solidFill>
-                  <a:schemeClr val="tx1"/>
-                </a:solidFill>
-                <a:effectLst/>
-                <a:latin typeface="Batang" panose="02030600000101010101" pitchFamily="18" charset="-127"/>
-                <a:ea typeface="Batang" panose="02030600000101010101" pitchFamily="18" charset="-127"/>
-                <a:cs typeface="+mj-cs"/>
-              </a:defRPr>
-            </a:lvl1pPr>
-          </a:lstStyle>
-          <a:p>
-            <a:pPr algn="l"/>
-            <a:r>
-              <a:rPr lang="en-US" altLang="ko-KR" sz="2800" cap="none" dirty="0">
-                <a:solidFill>
-                  <a:schemeClr val="bg2">
-                    <a:lumMod val="25000"/>
-                  </a:schemeClr>
-                </a:solidFill>
-                <a:latin typeface="D2Coding" panose="020B0609020101020101" pitchFamily="49" charset="-127"/>
-                <a:ea typeface="D2Coding" panose="020B0609020101020101" pitchFamily="49" charset="-127"/>
-                <a:cs typeface="Segoe UI Light" panose="020B0502040204020203" pitchFamily="34" charset="0"/>
-              </a:rPr>
-              <a:t>Visualizing intermediate activations</a:t>
-            </a:r>
-          </a:p>
-        </p:txBody>
-      </p:sp>
-      <p:sp>
-        <p:nvSpPr>
-          <p:cNvPr id="5" name="TextBox 4">
-            <a:extLst>
-              <a:ext uri="{FF2B5EF4-FFF2-40B4-BE49-F238E27FC236}">
-                <a16:creationId xmlns:a16="http://schemas.microsoft.com/office/drawing/2014/main" id="{5575540F-A624-4040-9666-49BEBDF779B3}"/>
-              </a:ext>
-            </a:extLst>
-          </p:cNvPr>
-          <p:cNvSpPr txBox="1"/>
-          <p:nvPr/>
-        </p:nvSpPr>
-        <p:spPr>
-          <a:xfrm>
-            <a:off x="682484" y="1303722"/>
-            <a:ext cx="10890392" cy="1162498"/>
-          </a:xfrm>
-          <a:prstGeom prst="rect">
-            <a:avLst/>
-          </a:prstGeom>
-          <a:noFill/>
-        </p:spPr>
-        <p:txBody>
-          <a:bodyPr wrap="square" rtlCol="0">
-            <a:spAutoFit/>
-          </a:bodyPr>
-          <a:lstStyle/>
-          <a:p>
-            <a:pPr lvl="0" fontAlgn="base">
-              <a:lnSpc>
-                <a:spcPct val="150000"/>
-              </a:lnSpc>
-              <a:spcBef>
-                <a:spcPct val="0"/>
-              </a:spcBef>
-              <a:spcAft>
-                <a:spcPct val="0"/>
-              </a:spcAft>
-            </a:pPr>
-            <a:r>
-              <a:rPr lang="ko-KR" altLang="en-US" sz="1600" dirty="0" err="1">
-                <a:latin typeface="D2Coding" panose="020B0609020101020101" pitchFamily="49" charset="-127"/>
-                <a:ea typeface="D2Coding" panose="020B0609020101020101" pitchFamily="49" charset="-127"/>
-              </a:rPr>
-              <a:t>합성곱</a:t>
-            </a:r>
-            <a:r>
-              <a:rPr lang="ko-KR" altLang="en-US" sz="1600" dirty="0">
-                <a:latin typeface="D2Coding" panose="020B0609020101020101" pitchFamily="49" charset="-127"/>
-                <a:ea typeface="D2Coding" panose="020B0609020101020101" pitchFamily="49" charset="-127"/>
-              </a:rPr>
-              <a:t> 신경망</a:t>
-            </a:r>
-            <a:r>
-              <a:rPr lang="en-US" altLang="ko-KR" sz="1600" dirty="0">
-                <a:latin typeface="D2Coding" panose="020B0609020101020101" pitchFamily="49" charset="-127"/>
-                <a:ea typeface="D2Coding" panose="020B0609020101020101" pitchFamily="49" charset="-127"/>
-              </a:rPr>
-              <a:t>(</a:t>
-            </a:r>
-            <a:r>
-              <a:rPr lang="en-US" altLang="ko-KR" sz="1600" dirty="0" err="1">
-                <a:latin typeface="D2Coding" panose="020B0609020101020101" pitchFamily="49" charset="-127"/>
-                <a:ea typeface="D2Coding" panose="020B0609020101020101" pitchFamily="49" charset="-127"/>
-              </a:rPr>
-              <a:t>ConvNet</a:t>
-            </a:r>
-            <a:r>
-              <a:rPr lang="en-US" altLang="ko-KR" sz="1600" dirty="0">
-                <a:latin typeface="D2Coding" panose="020B0609020101020101" pitchFamily="49" charset="-127"/>
-                <a:ea typeface="D2Coding" panose="020B0609020101020101" pitchFamily="49" charset="-127"/>
-              </a:rPr>
-              <a:t>)</a:t>
-            </a:r>
-            <a:r>
-              <a:rPr lang="ko-KR" altLang="en-US" sz="1600" dirty="0">
-                <a:latin typeface="D2Coding" panose="020B0609020101020101" pitchFamily="49" charset="-127"/>
-                <a:ea typeface="D2Coding" panose="020B0609020101020101" pitchFamily="49" charset="-127"/>
-              </a:rPr>
-              <a:t>의 중간 활성화</a:t>
-            </a:r>
-            <a:r>
-              <a:rPr lang="en-US" altLang="ko-KR" sz="1600" dirty="0">
-                <a:latin typeface="D2Coding" panose="020B0609020101020101" pitchFamily="49" charset="-127"/>
-                <a:ea typeface="D2Coding" panose="020B0609020101020101" pitchFamily="49" charset="-127"/>
-              </a:rPr>
-              <a:t>(Intermediate activations)</a:t>
-            </a:r>
-            <a:r>
-              <a:rPr lang="ko-KR" altLang="en-US" sz="1600" dirty="0">
-                <a:latin typeface="D2Coding" panose="020B0609020101020101" pitchFamily="49" charset="-127"/>
-                <a:ea typeface="D2Coding" panose="020B0609020101020101" pitchFamily="49" charset="-127"/>
-              </a:rPr>
-              <a:t>의 시각화는 특정 입력이 주어졌을 때 다양한 </a:t>
-            </a:r>
-            <a:r>
-              <a:rPr lang="ko-KR" altLang="en-US" sz="1600" dirty="0" err="1">
-                <a:latin typeface="D2Coding" panose="020B0609020101020101" pitchFamily="49" charset="-127"/>
-                <a:ea typeface="D2Coding" panose="020B0609020101020101" pitchFamily="49" charset="-127"/>
-              </a:rPr>
-              <a:t>합성곱</a:t>
-            </a:r>
-            <a:r>
-              <a:rPr lang="en-US" altLang="ko-KR" sz="1600" dirty="0">
-                <a:latin typeface="D2Coding" panose="020B0609020101020101" pitchFamily="49" charset="-127"/>
-                <a:ea typeface="D2Coding" panose="020B0609020101020101" pitchFamily="49" charset="-127"/>
-              </a:rPr>
-              <a:t>(Convolution) </a:t>
-            </a:r>
-            <a:r>
-              <a:rPr lang="ko-KR" altLang="en-US" sz="1600" dirty="0">
-                <a:latin typeface="D2Coding" panose="020B0609020101020101" pitchFamily="49" charset="-127"/>
-                <a:ea typeface="D2Coding" panose="020B0609020101020101" pitchFamily="49" charset="-127"/>
-              </a:rPr>
-              <a:t>층과 </a:t>
-            </a:r>
-            <a:r>
-              <a:rPr lang="ko-KR" altLang="en-US" sz="1600" dirty="0" err="1">
-                <a:latin typeface="D2Coding" panose="020B0609020101020101" pitchFamily="49" charset="-127"/>
-                <a:ea typeface="D2Coding" panose="020B0609020101020101" pitchFamily="49" charset="-127"/>
-              </a:rPr>
-              <a:t>풀링</a:t>
-            </a:r>
-            <a:r>
-              <a:rPr lang="en-US" altLang="ko-KR" sz="1600" dirty="0">
-                <a:latin typeface="D2Coding" panose="020B0609020101020101" pitchFamily="49" charset="-127"/>
-                <a:ea typeface="D2Coding" panose="020B0609020101020101" pitchFamily="49" charset="-127"/>
-              </a:rPr>
-              <a:t>(Pooling) </a:t>
-            </a:r>
-            <a:r>
-              <a:rPr lang="ko-KR" altLang="en-US" sz="1600" dirty="0">
-                <a:latin typeface="D2Coding" panose="020B0609020101020101" pitchFamily="49" charset="-127"/>
-                <a:ea typeface="D2Coding" panose="020B0609020101020101" pitchFamily="49" charset="-127"/>
-              </a:rPr>
-              <a:t>층이 반환하는 출력</a:t>
-            </a:r>
-            <a:r>
-              <a:rPr lang="en-US" altLang="ko-KR" sz="1600" dirty="0">
-                <a:latin typeface="D2Coding" panose="020B0609020101020101" pitchFamily="49" charset="-127"/>
-                <a:ea typeface="D2Coding" panose="020B0609020101020101" pitchFamily="49" charset="-127"/>
-              </a:rPr>
-              <a:t> </a:t>
-            </a:r>
-            <a:r>
-              <a:rPr lang="ko-KR" altLang="en-US" sz="1600" dirty="0">
-                <a:latin typeface="D2Coding" panose="020B0609020101020101" pitchFamily="49" charset="-127"/>
-                <a:ea typeface="D2Coding" panose="020B0609020101020101" pitchFamily="49" charset="-127"/>
-              </a:rPr>
-              <a:t>값들을 보여주는 것</a:t>
-            </a:r>
-            <a:r>
-              <a:rPr lang="en-US" altLang="ko-KR" sz="1600" dirty="0">
-                <a:latin typeface="D2Coding" panose="020B0609020101020101" pitchFamily="49" charset="-127"/>
-                <a:ea typeface="D2Coding" panose="020B0609020101020101" pitchFamily="49" charset="-127"/>
-              </a:rPr>
-              <a:t>(</a:t>
-            </a:r>
-            <a:r>
-              <a:rPr lang="ko-KR" altLang="en-US" sz="1600" dirty="0">
-                <a:latin typeface="D2Coding" panose="020B0609020101020101" pitchFamily="49" charset="-127"/>
-                <a:ea typeface="D2Coding" panose="020B0609020101020101" pitchFamily="49" charset="-127"/>
-              </a:rPr>
-              <a:t>층의 출력은 흔히 활성화 함수의 출력물이라는 의미에서 활성화</a:t>
-            </a:r>
-            <a:r>
-              <a:rPr lang="en-US" altLang="ko-KR" sz="1600" dirty="0">
-                <a:latin typeface="D2Coding" panose="020B0609020101020101" pitchFamily="49" charset="-127"/>
-                <a:ea typeface="D2Coding" panose="020B0609020101020101" pitchFamily="49" charset="-127"/>
-              </a:rPr>
-              <a:t>(Activation), </a:t>
-            </a:r>
-            <a:r>
-              <a:rPr lang="ko-KR" altLang="en-US" sz="1600" dirty="0" err="1">
-                <a:latin typeface="D2Coding" panose="020B0609020101020101" pitchFamily="49" charset="-127"/>
-                <a:ea typeface="D2Coding" panose="020B0609020101020101" pitchFamily="49" charset="-127"/>
-              </a:rPr>
-              <a:t>특성맵</a:t>
-            </a:r>
-            <a:r>
-              <a:rPr lang="en-US" altLang="ko-KR" sz="1600" dirty="0">
-                <a:latin typeface="D2Coding" panose="020B0609020101020101" pitchFamily="49" charset="-127"/>
-                <a:ea typeface="D2Coding" panose="020B0609020101020101" pitchFamily="49" charset="-127"/>
-              </a:rPr>
-              <a:t>(Feature Map))</a:t>
-            </a:r>
-          </a:p>
-        </p:txBody>
-      </p:sp>
-    </p:spTree>
-    <p:extLst>
-      <p:ext uri="{BB962C8B-B14F-4D97-AF65-F5344CB8AC3E}">
-        <p14:creationId xmlns:p14="http://schemas.microsoft.com/office/powerpoint/2010/main" val="2611555648"/>
-      </p:ext>
-    </p:extLst>
-  </p:cSld>
-  <p:clrMapOvr>
-    <a:masterClrMapping/>
-  </p:clrMapOvr>
-</p:sld>
-</file>
-
-<file path=ppt/slides/slide9.xml><?xml version="1.0" encoding="utf-8"?>
-<p:sld xmlns:a="http://schemas.openxmlformats.org/drawingml/2006/main" xmlns:r="http://schemas.openxmlformats.org/officeDocument/2006/relationships" xmlns:p="http://schemas.openxmlformats.org/presentationml/2006/main">
-  <p:cSld>
-    <p:spTree>
-      <p:nvGrpSpPr>
-        <p:cNvPr id="1" name="">
-          <a:extLst>
-            <a:ext uri="{FF2B5EF4-FFF2-40B4-BE49-F238E27FC236}">
-              <a16:creationId xmlns:a16="http://schemas.microsoft.com/office/drawing/2014/main" id="{A4859ECB-1ADE-67B3-8CAE-2F612B316899}"/>
-            </a:ext>
-          </a:extLst>
-        </p:cNvPr>
-        <p:cNvGrpSpPr/>
-        <p:nvPr/>
-      </p:nvGrpSpPr>
-      <p:grpSpPr>
-        <a:xfrm>
-          <a:off x="0" y="0"/>
-          <a:ext cx="0" cy="0"/>
-          <a:chOff x="0" y="0"/>
-          <a:chExt cx="0" cy="0"/>
-        </a:xfrm>
-      </p:grpSpPr>
-      <p:sp>
-        <p:nvSpPr>
-          <p:cNvPr id="4" name="슬라이드 번호 개체 틀 3">
-            <a:extLst>
-              <a:ext uri="{FF2B5EF4-FFF2-40B4-BE49-F238E27FC236}">
-                <a16:creationId xmlns:a16="http://schemas.microsoft.com/office/drawing/2014/main" id="{D21C4870-5BBA-ABE6-D324-0BFEDE78D798}"/>
-              </a:ext>
-            </a:extLst>
-          </p:cNvPr>
-          <p:cNvSpPr>
-            <a:spLocks noGrp="1"/>
-          </p:cNvSpPr>
-          <p:nvPr>
-            <p:ph type="sldNum" sz="quarter" idx="12"/>
-          </p:nvPr>
-        </p:nvSpPr>
-        <p:spPr>
-          <a:xfrm>
-            <a:off x="10514011" y="6036261"/>
-            <a:ext cx="753545" cy="365125"/>
-          </a:xfrm>
-        </p:spPr>
-        <p:txBody>
-          <a:bodyPr/>
-          <a:lstStyle/>
-          <a:p>
-            <a:fld id="{D57F1E4F-1CFF-5643-939E-217C01CDF565}" type="slidenum">
-              <a:rPr lang="en-US" smtClean="0"/>
-              <a:pPr/>
-              <a:t>9</a:t>
-            </a:fld>
-            <a:endParaRPr lang="en-US" dirty="0"/>
-          </a:p>
-        </p:txBody>
-      </p:sp>
-      <p:sp>
-        <p:nvSpPr>
-          <p:cNvPr id="3" name="제목 1">
-            <a:extLst>
-              <a:ext uri="{FF2B5EF4-FFF2-40B4-BE49-F238E27FC236}">
-                <a16:creationId xmlns:a16="http://schemas.microsoft.com/office/drawing/2014/main" id="{07697D12-A4EA-A564-F3A4-AD0AD672A979}"/>
-              </a:ext>
-            </a:extLst>
-          </p:cNvPr>
-          <p:cNvSpPr txBox="1">
-            <a:spLocks/>
-          </p:cNvSpPr>
-          <p:nvPr/>
-        </p:nvSpPr>
-        <p:spPr>
-          <a:xfrm>
-            <a:off x="475645" y="481983"/>
-            <a:ext cx="10353762" cy="766439"/>
-          </a:xfrm>
-          <a:prstGeom prst="rect">
-            <a:avLst/>
-          </a:prstGeom>
-        </p:spPr>
-        <p:txBody>
-          <a:bodyPr vert="horz" lIns="91440" tIns="45720" rIns="91440" bIns="45720" rtlCol="0" anchor="ctr">
-            <a:normAutofit/>
-          </a:bodyPr>
-          <a:lstStyle>
-            <a:lvl1pPr algn="ctr" defTabSz="914400" rtl="0" eaLnBrk="1" latinLnBrk="1" hangingPunct="1">
-              <a:lnSpc>
-                <a:spcPct val="90000"/>
-              </a:lnSpc>
-              <a:spcBef>
-                <a:spcPct val="0"/>
-              </a:spcBef>
-              <a:buNone/>
-              <a:defRPr sz="3200" kern="1200" cap="all" baseline="0">
-                <a:solidFill>
-                  <a:schemeClr val="tx1"/>
-                </a:solidFill>
-                <a:effectLst/>
-                <a:latin typeface="Batang" panose="02030600000101010101" pitchFamily="18" charset="-127"/>
-                <a:ea typeface="Batang" panose="02030600000101010101" pitchFamily="18" charset="-127"/>
-                <a:cs typeface="+mj-cs"/>
-              </a:defRPr>
-            </a:lvl1pPr>
-          </a:lstStyle>
-          <a:p>
-            <a:pPr algn="l"/>
-            <a:r>
-              <a:rPr lang="en-US" altLang="ko-KR" sz="2800" cap="none" dirty="0">
-                <a:solidFill>
-                  <a:schemeClr val="bg2">
-                    <a:lumMod val="25000"/>
-                  </a:schemeClr>
-                </a:solidFill>
-                <a:latin typeface="D2Coding" panose="020B0609020101020101" pitchFamily="49" charset="-127"/>
-                <a:ea typeface="D2Coding" panose="020B0609020101020101" pitchFamily="49" charset="-127"/>
-                <a:cs typeface="Segoe UI Light" panose="020B0502040204020203" pitchFamily="34" charset="0"/>
-              </a:rPr>
-              <a:t>Visualizing intermediate activations</a:t>
-            </a:r>
-          </a:p>
-        </p:txBody>
-      </p:sp>
-      <p:sp>
-        <p:nvSpPr>
-          <p:cNvPr id="5" name="TextBox 4">
-            <a:extLst>
-              <a:ext uri="{FF2B5EF4-FFF2-40B4-BE49-F238E27FC236}">
-                <a16:creationId xmlns:a16="http://schemas.microsoft.com/office/drawing/2014/main" id="{DFD7F2E3-19B3-5468-597A-6D03F31F32E7}"/>
-              </a:ext>
-            </a:extLst>
-          </p:cNvPr>
-          <p:cNvSpPr txBox="1"/>
-          <p:nvPr/>
-        </p:nvSpPr>
-        <p:spPr>
-          <a:xfrm>
-            <a:off x="682484" y="1303722"/>
-            <a:ext cx="10890392" cy="465320"/>
-          </a:xfrm>
-          <a:prstGeom prst="rect">
-            <a:avLst/>
-          </a:prstGeom>
-          <a:noFill/>
-        </p:spPr>
-        <p:txBody>
-          <a:bodyPr wrap="square" rtlCol="0">
-            <a:spAutoFit/>
-          </a:bodyPr>
-          <a:lstStyle/>
-          <a:p>
-            <a:pPr lvl="0" fontAlgn="base">
-              <a:lnSpc>
-                <a:spcPct val="150000"/>
-              </a:lnSpc>
-              <a:spcBef>
-                <a:spcPct val="0"/>
-              </a:spcBef>
-              <a:spcAft>
-                <a:spcPct val="0"/>
-              </a:spcAft>
-            </a:pPr>
-            <a:r>
-              <a:rPr lang="ko-KR" altLang="en-US" dirty="0" err="1">
-                <a:latin typeface="D2Coding" panose="020B0609020101020101" pitchFamily="49" charset="-127"/>
-                <a:ea typeface="D2Coding" panose="020B0609020101020101" pitchFamily="49" charset="-127"/>
-              </a:rPr>
-              <a:t>합성곱</a:t>
-            </a:r>
-            <a:r>
-              <a:rPr lang="ko-KR" altLang="en-US" dirty="0">
-                <a:latin typeface="D2Coding" panose="020B0609020101020101" pitchFamily="49" charset="-127"/>
-                <a:ea typeface="D2Coding" panose="020B0609020101020101" pitchFamily="49" charset="-127"/>
-              </a:rPr>
-              <a:t> 신경망</a:t>
-            </a:r>
-            <a:r>
-              <a:rPr lang="en-US" altLang="ko-KR" dirty="0">
-                <a:latin typeface="D2Coding" panose="020B0609020101020101" pitchFamily="49" charset="-127"/>
-                <a:ea typeface="D2Coding" panose="020B0609020101020101" pitchFamily="49" charset="-127"/>
-              </a:rPr>
-              <a:t>(</a:t>
-            </a:r>
-            <a:r>
-              <a:rPr lang="en-US" altLang="ko-KR" dirty="0" err="1">
-                <a:latin typeface="D2Coding" panose="020B0609020101020101" pitchFamily="49" charset="-127"/>
-                <a:ea typeface="D2Coding" panose="020B0609020101020101" pitchFamily="49" charset="-127"/>
-              </a:rPr>
-              <a:t>ConvNet</a:t>
-            </a:r>
-            <a:r>
-              <a:rPr lang="en-US" altLang="ko-KR" dirty="0">
-                <a:latin typeface="D2Coding" panose="020B0609020101020101" pitchFamily="49" charset="-127"/>
-                <a:ea typeface="D2Coding" panose="020B0609020101020101" pitchFamily="49" charset="-127"/>
-              </a:rPr>
-              <a:t>)</a:t>
-            </a:r>
-            <a:r>
-              <a:rPr lang="ko-KR" altLang="en-US" dirty="0">
-                <a:latin typeface="D2Coding" panose="020B0609020101020101" pitchFamily="49" charset="-127"/>
-                <a:ea typeface="D2Coding" panose="020B0609020101020101" pitchFamily="49" charset="-127"/>
-              </a:rPr>
-              <a:t>의 </a:t>
-            </a:r>
-            <a:r>
-              <a:rPr lang="en-US" altLang="ko-KR" dirty="0">
-                <a:latin typeface="D2Coding" panose="020B0609020101020101" pitchFamily="49" charset="-127"/>
-                <a:ea typeface="D2Coding" panose="020B0609020101020101" pitchFamily="49" charset="-127"/>
-              </a:rPr>
-              <a:t>‘</a:t>
-            </a:r>
-            <a:r>
-              <a:rPr lang="ko-KR" altLang="en-US" dirty="0">
-                <a:latin typeface="D2Coding" panose="020B0609020101020101" pitchFamily="49" charset="-127"/>
-                <a:ea typeface="D2Coding" panose="020B0609020101020101" pitchFamily="49" charset="-127"/>
-              </a:rPr>
-              <a:t>시각화 및 시각적 설명 가능성</a:t>
-            </a:r>
-            <a:r>
-              <a:rPr lang="en-US" altLang="ko-KR" dirty="0">
-                <a:latin typeface="D2Coding" panose="020B0609020101020101" pitchFamily="49" charset="-127"/>
-                <a:ea typeface="D2Coding" panose="020B0609020101020101" pitchFamily="49" charset="-127"/>
-              </a:rPr>
-              <a:t>(Interpretability)’</a:t>
-            </a:r>
-          </a:p>
-        </p:txBody>
-      </p:sp>
-    </p:spTree>
-    <p:extLst>
-      <p:ext uri="{BB962C8B-B14F-4D97-AF65-F5344CB8AC3E}">
-        <p14:creationId xmlns:p14="http://schemas.microsoft.com/office/powerpoint/2010/main" val="3103881654"/>
       </p:ext>
     </p:extLst>
   </p:cSld>
